--- a/2-大一下/01 数据结构/PPT（张学）/第三章  栈和队列.pptx
+++ b/2-大一下/01 数据结构/PPT（张学）/第三章  栈和队列.pptx
@@ -5,10 +5,10 @@
     <p:sldMasterId id="2147483650" r:id="rId1"/>
   </p:sldMasterIdLst>
   <p:notesMasterIdLst>
-    <p:notesMasterId r:id="rId55"/>
+    <p:notesMasterId r:id="rId68"/>
   </p:notesMasterIdLst>
   <p:handoutMasterIdLst>
-    <p:handoutMasterId r:id="rId56"/>
+    <p:handoutMasterId r:id="rId69"/>
   </p:handoutMasterIdLst>
   <p:sldIdLst>
     <p:sldId id="263" r:id="rId2"/>
@@ -64,6 +64,19 @@
     <p:sldId id="322" r:id="rId52"/>
     <p:sldId id="323" r:id="rId53"/>
     <p:sldId id="324" r:id="rId54"/>
+    <p:sldId id="328" r:id="rId55"/>
+    <p:sldId id="329" r:id="rId56"/>
+    <p:sldId id="330" r:id="rId57"/>
+    <p:sldId id="331" r:id="rId58"/>
+    <p:sldId id="332" r:id="rId59"/>
+    <p:sldId id="333" r:id="rId60"/>
+    <p:sldId id="334" r:id="rId61"/>
+    <p:sldId id="335" r:id="rId62"/>
+    <p:sldId id="336" r:id="rId63"/>
+    <p:sldId id="337" r:id="rId64"/>
+    <p:sldId id="338" r:id="rId65"/>
+    <p:sldId id="339" r:id="rId66"/>
+    <p:sldId id="340" r:id="rId67"/>
   </p:sldIdLst>
   <p:sldSz cx="12192000" cy="6858000"/>
   <p:notesSz cx="6996113" cy="9283700"/>
@@ -319,7 +332,7 @@
           <a:p>
             <a:fld id="{0C16664E-1BF0-46AE-AAC0-8104A4986E05}" type="datetimeFigureOut">
               <a:rPr lang="zh-CN" altLang="en-US" smtClean="0"/>
-              <a:t>2022/3/17</a:t>
+              <a:t>2026/4/1</a:t>
             </a:fld>
             <a:endParaRPr lang="zh-CN" altLang="en-US"/>
           </a:p>
@@ -4211,12 +4224,8 @@
               <a:buNone/>
             </a:pPr>
             <a:r>
-              <a:rPr lang="en-US" altLang="zh-CN" b="0" dirty="0" err="1"/>
-              <a:t>YesNo</a:t>
-            </a:r>
-            <a:r>
-              <a:rPr lang="en-US" altLang="zh-CN" b="0" dirty="0"/>
-              <a:t> </a:t>
+              <a:rPr lang="en-US" altLang="zh-CN" b="0" dirty="0"/>
+              <a:t>bool </a:t>
             </a:r>
             <a:r>
               <a:rPr lang="en-US" altLang="zh-CN" b="0" dirty="0" err="1"/>
@@ -4272,7 +4281,7 @@
             </a:pPr>
             <a:r>
               <a:rPr lang="en-US" altLang="zh-CN" b="0" dirty="0"/>
-              <a:t>        return YES;</a:t>
+              <a:t>        return true;</a:t>
             </a:r>
           </a:p>
           <a:p>
@@ -4308,7 +4317,7 @@
             </a:pPr>
             <a:r>
               <a:rPr lang="en-US" altLang="zh-CN" b="0" dirty="0"/>
-              <a:t>        return NO;</a:t>
+              <a:t>        return false;</a:t>
             </a:r>
           </a:p>
           <a:p>
@@ -4556,15 +4565,7 @@
             </a:r>
             <a:r>
               <a:rPr lang="en-US" altLang="zh-CN" b="0" dirty="0"/>
-              <a:t>-&gt;</a:t>
-            </a:r>
-            <a:r>
-              <a:rPr lang="en-US" altLang="zh-CN" b="0" dirty="0" err="1"/>
-              <a:t>elemArray</a:t>
-            </a:r>
-            <a:r>
-              <a:rPr lang="en-US" altLang="zh-CN" b="0" dirty="0"/>
-              <a:t>[</a:t>
+              <a:t>-&gt;a[</a:t>
             </a:r>
             <a:r>
               <a:rPr lang="en-US" altLang="zh-CN" b="0" dirty="0" err="1"/>
@@ -4796,7 +4797,7 @@
             </a:r>
             <a:r>
               <a:rPr lang="en-US" altLang="zh-CN" b="0" dirty="0"/>
-              <a:t>)==YES){</a:t>
+              <a:t>)==true){</a:t>
             </a:r>
           </a:p>
           <a:p>
@@ -4868,15 +4869,7 @@
             </a:r>
             <a:r>
               <a:rPr lang="en-US" altLang="zh-CN" b="0" dirty="0"/>
-              <a:t>-&gt;</a:t>
-            </a:r>
-            <a:r>
-              <a:rPr lang="en-US" altLang="zh-CN" b="0" dirty="0" err="1"/>
-              <a:t>elemArray</a:t>
-            </a:r>
-            <a:r>
-              <a:rPr lang="en-US" altLang="zh-CN" b="0" dirty="0"/>
-              <a:t>[</a:t>
+              <a:t>-&gt;a[</a:t>
             </a:r>
             <a:r>
               <a:rPr lang="en-US" altLang="zh-CN" b="0" dirty="0" err="1"/>
@@ -5132,15 +5125,7 @@
             </a:r>
             <a:r>
               <a:rPr lang="en-US" altLang="zh-CN" b="0" dirty="0"/>
-              <a:t>-&gt;</a:t>
-            </a:r>
-            <a:r>
-              <a:rPr lang="en-US" altLang="zh-CN" b="0" dirty="0" err="1"/>
-              <a:t>elemArray</a:t>
-            </a:r>
-            <a:r>
-              <a:rPr lang="en-US" altLang="zh-CN" b="0" dirty="0"/>
-              <a:t>[</a:t>
+              <a:t>-&gt;a[</a:t>
             </a:r>
             <a:r>
               <a:rPr lang="en-US" altLang="zh-CN" b="0" dirty="0" err="1"/>
@@ -5254,7 +5239,7 @@
           <a:p>
             <a:r>
               <a:rPr lang="zh-CN" altLang="en-US" dirty="0"/>
-              <a:t>用动态数组实现通用栈</a:t>
+              <a:t>用动态数组实现泛型栈</a:t>
             </a:r>
           </a:p>
         </p:txBody>
@@ -5300,15 +5285,7 @@
             </a:pPr>
             <a:r>
               <a:rPr lang="en-US" altLang="zh-CN" b="0" dirty="0"/>
-              <a:t>    </a:t>
-            </a:r>
-            <a:r>
-              <a:rPr lang="en-US" altLang="zh-CN" b="0" dirty="0" err="1"/>
-              <a:t>GenericPointer</a:t>
-            </a:r>
-            <a:r>
-              <a:rPr lang="en-US" altLang="zh-CN" b="0" dirty="0"/>
-              <a:t>*  </a:t>
+              <a:t>    void*  </a:t>
             </a:r>
             <a:r>
               <a:rPr lang="en-US" altLang="zh-CN" b="0" dirty="0" err="1"/>
@@ -5328,15 +5305,7 @@
             </a:pPr>
             <a:r>
               <a:rPr lang="en-US" altLang="zh-CN" b="0" dirty="0"/>
-              <a:t>    </a:t>
-            </a:r>
-            <a:r>
-              <a:rPr lang="en-US" altLang="zh-CN" b="0" dirty="0" err="1"/>
-              <a:t>GenericPointer</a:t>
-            </a:r>
-            <a:r>
-              <a:rPr lang="en-US" altLang="zh-CN" b="0" dirty="0"/>
-              <a:t>*  </a:t>
+              <a:t>    void*  </a:t>
             </a:r>
             <a:r>
               <a:rPr lang="en-US" altLang="zh-CN" b="0" dirty="0" err="1"/>
@@ -5356,7 +5325,35 @@
             </a:pPr>
             <a:r>
               <a:rPr lang="en-US" altLang="zh-CN" b="0" dirty="0"/>
-              <a:t>    int size;</a:t>
+              <a:t>    int </a:t>
+            </a:r>
+            <a:r>
+              <a:rPr lang="en-US" altLang="zh-CN" b="0" dirty="0" err="1"/>
+              <a:t>elemSize</a:t>
+            </a:r>
+            <a:r>
+              <a:rPr lang="en-US" altLang="zh-CN" b="0" dirty="0"/>
+              <a:t>;</a:t>
+            </a:r>
+          </a:p>
+          <a:p>
+            <a:pPr marL="0" indent="0">
+              <a:lnSpc>
+                <a:spcPct val="120000"/>
+              </a:lnSpc>
+              <a:buNone/>
+            </a:pPr>
+            <a:r>
+              <a:rPr lang="en-US" altLang="zh-CN" b="0" dirty="0"/>
+              <a:t>    int </a:t>
+            </a:r>
+            <a:r>
+              <a:rPr lang="en-US" altLang="zh-CN" b="0" dirty="0" err="1"/>
+              <a:t>stackSize</a:t>
+            </a:r>
+            <a:r>
+              <a:rPr lang="en-US" altLang="zh-CN" b="0" dirty="0"/>
+              <a:t>;</a:t>
             </a:r>
           </a:p>
           <a:p>
@@ -5481,11 +5478,135 @@
             </a:r>
             <a:r>
               <a:rPr lang="en-US" altLang="zh-CN" b="0" dirty="0" err="1"/>
+              <a:t>pStack,int</a:t>
+            </a:r>
+            <a:r>
+              <a:rPr lang="en-US" altLang="zh-CN" b="0" dirty="0"/>
+              <a:t> </a:t>
+            </a:r>
+            <a:r>
+              <a:rPr lang="en-US" altLang="zh-CN" b="0" dirty="0" err="1"/>
+              <a:t>elemSize</a:t>
+            </a:r>
+            <a:r>
+              <a:rPr lang="en-US" altLang="zh-CN" b="0" dirty="0"/>
+              <a:t>) {</a:t>
+            </a:r>
+          </a:p>
+          <a:p>
+            <a:pPr marL="0" indent="0">
+              <a:lnSpc>
+                <a:spcPct val="100000"/>
+              </a:lnSpc>
+              <a:buNone/>
+            </a:pPr>
+            <a:r>
+              <a:rPr lang="en-US" altLang="zh-CN" b="0" dirty="0"/>
+              <a:t>    </a:t>
+            </a:r>
+            <a:r>
+              <a:rPr lang="en-US" altLang="zh-CN" b="0" dirty="0" err="1"/>
               <a:t>pStack</a:t>
             </a:r>
             <a:r>
               <a:rPr lang="en-US" altLang="zh-CN" b="0" dirty="0"/>
-              <a:t>) {</a:t>
+              <a:t>-&gt;</a:t>
+            </a:r>
+            <a:r>
+              <a:rPr lang="en-US" altLang="zh-CN" b="0" dirty="0" err="1"/>
+              <a:t>pBase</a:t>
+            </a:r>
+            <a:r>
+              <a:rPr lang="en-US" altLang="zh-CN" b="0" dirty="0"/>
+              <a:t>=(</a:t>
+            </a:r>
+            <a:r>
+              <a:rPr lang="en-US" altLang="zh-CN" b="0" dirty="0" err="1"/>
+              <a:t>GenericPointer</a:t>
+            </a:r>
+            <a:r>
+              <a:rPr lang="en-US" altLang="zh-CN" b="0" dirty="0"/>
+              <a:t>*)malloc(</a:t>
+            </a:r>
+          </a:p>
+          <a:p>
+            <a:pPr marL="0" indent="0">
+              <a:lnSpc>
+                <a:spcPct val="100000"/>
+              </a:lnSpc>
+              <a:buNone/>
+            </a:pPr>
+            <a:r>
+              <a:rPr lang="en-US" altLang="zh-CN" b="0" dirty="0"/>
+              <a:t>                           STACK_INIT_SIZE*</a:t>
+            </a:r>
+            <a:r>
+              <a:rPr lang="en-US" altLang="zh-CN" b="0" dirty="0" err="1"/>
+              <a:t>elemSize</a:t>
+            </a:r>
+            <a:r>
+              <a:rPr lang="en-US" altLang="zh-CN" b="0" dirty="0"/>
+              <a:t>);</a:t>
+            </a:r>
+          </a:p>
+          <a:p>
+            <a:pPr marL="0" indent="0">
+              <a:lnSpc>
+                <a:spcPct val="100000"/>
+              </a:lnSpc>
+              <a:buNone/>
+            </a:pPr>
+            <a:r>
+              <a:rPr lang="en-US" altLang="zh-CN" b="0" dirty="0"/>
+              <a:t>    if(</a:t>
+            </a:r>
+            <a:r>
+              <a:rPr lang="en-US" altLang="zh-CN" b="0" dirty="0" err="1"/>
+              <a:t>pStack</a:t>
+            </a:r>
+            <a:r>
+              <a:rPr lang="en-US" altLang="zh-CN" b="0" dirty="0"/>
+              <a:t>-&gt;</a:t>
+            </a:r>
+            <a:r>
+              <a:rPr lang="en-US" altLang="zh-CN" b="0" dirty="0" err="1"/>
+              <a:t>pBase</a:t>
+            </a:r>
+            <a:r>
+              <a:rPr lang="en-US" altLang="zh-CN" b="0" dirty="0"/>
+              <a:t>==</a:t>
+            </a:r>
+            <a:r>
+              <a:rPr lang="en-US" altLang="zh-CN" b="0" dirty="0" err="1"/>
+              <a:t>nullptr</a:t>
+            </a:r>
+            <a:r>
+              <a:rPr lang="en-US" altLang="zh-CN" b="0" dirty="0"/>
+              <a:t>){</a:t>
+            </a:r>
+          </a:p>
+          <a:p>
+            <a:pPr marL="0" indent="0">
+              <a:lnSpc>
+                <a:spcPct val="100000"/>
+              </a:lnSpc>
+              <a:buNone/>
+            </a:pPr>
+            <a:r>
+              <a:rPr lang="en-US" altLang="zh-CN" b="0" dirty="0"/>
+              <a:t>        return ERROR;</a:t>
+            </a:r>
+          </a:p>
+          <a:p>
+            <a:pPr marL="0" indent="0">
+              <a:lnSpc>
+                <a:spcPct val="100000"/>
+              </a:lnSpc>
+              <a:buNone/>
+            </a:pPr>
+            <a:r>
+              <a:rPr lang="en-US" altLang="zh-CN" b="0" dirty="0"/>
+              <a:t>    }</a:t>
             </a:r>
           </a:p>
           <a:p>
@@ -5509,59 +5630,39 @@
             </a:r>
             <a:r>
               <a:rPr lang="en-US" altLang="zh-CN" b="0" dirty="0" err="1"/>
+              <a:t>pTop</a:t>
+            </a:r>
+            <a:r>
+              <a:rPr lang="en-US" altLang="zh-CN" b="0" dirty="0"/>
+              <a:t>=</a:t>
+            </a:r>
+            <a:r>
+              <a:rPr lang="en-US" altLang="zh-CN" b="0" dirty="0" err="1"/>
+              <a:t>pStack</a:t>
+            </a:r>
+            <a:r>
+              <a:rPr lang="en-US" altLang="zh-CN" b="0" dirty="0"/>
+              <a:t>-&gt;</a:t>
+            </a:r>
+            <a:r>
+              <a:rPr lang="en-US" altLang="zh-CN" b="0" dirty="0" err="1"/>
               <a:t>pBase</a:t>
             </a:r>
             <a:r>
               <a:rPr lang="en-US" altLang="zh-CN" b="0" dirty="0"/>
-              <a:t>=(</a:t>
-            </a:r>
-            <a:r>
-              <a:rPr lang="en-US" altLang="zh-CN" b="0" dirty="0" err="1"/>
-              <a:t>GenericPointer</a:t>
-            </a:r>
-            <a:r>
-              <a:rPr lang="en-US" altLang="zh-CN" b="0" dirty="0"/>
-              <a:t>*)malloc(</a:t>
-            </a:r>
-          </a:p>
-          <a:p>
-            <a:pPr marL="0" indent="0">
-              <a:lnSpc>
-                <a:spcPct val="100000"/>
-              </a:lnSpc>
-              <a:buNone/>
-            </a:pPr>
-            <a:r>
-              <a:rPr lang="en-US" altLang="zh-CN" b="0" dirty="0"/>
-              <a:t>                           STACK_INIT_SIZE*</a:t>
-            </a:r>
-            <a:r>
-              <a:rPr lang="en-US" altLang="zh-CN" b="0" dirty="0" err="1"/>
-              <a:t>sizeof</a:t>
-            </a:r>
-            <a:r>
-              <a:rPr lang="en-US" altLang="zh-CN" b="0" dirty="0"/>
-              <a:t>(</a:t>
-            </a:r>
-            <a:r>
-              <a:rPr lang="en-US" altLang="zh-CN" b="0" dirty="0" err="1"/>
-              <a:t>GenericPointer</a:t>
-            </a:r>
-            <a:r>
-              <a:rPr lang="en-US" altLang="zh-CN" b="0" dirty="0"/>
-              <a:t>));</a:t>
-            </a:r>
-          </a:p>
-          <a:p>
-            <a:pPr marL="0" indent="0">
-              <a:lnSpc>
-                <a:spcPct val="100000"/>
-              </a:lnSpc>
-              <a:buNone/>
-            </a:pPr>
-            <a:r>
-              <a:rPr lang="en-US" altLang="zh-CN" b="0" dirty="0"/>
-              <a:t>    if(</a:t>
+              <a:t>;</a:t>
+            </a:r>
+          </a:p>
+          <a:p>
+            <a:pPr marL="0" indent="0">
+              <a:lnSpc>
+                <a:spcPct val="100000"/>
+              </a:lnSpc>
+              <a:buNone/>
+            </a:pPr>
+            <a:r>
+              <a:rPr lang="en-US" altLang="zh-CN" b="0" dirty="0"/>
+              <a:t>    </a:t>
             </a:r>
             <a:r>
               <a:rPr lang="en-US" altLang="zh-CN" b="0" dirty="0" err="1"/>
@@ -5573,35 +5674,19 @@
             </a:r>
             <a:r>
               <a:rPr lang="en-US" altLang="zh-CN" b="0" dirty="0" err="1"/>
-              <a:t>pBase</a:t>
-            </a:r>
-            <a:r>
-              <a:rPr lang="en-US" altLang="zh-CN" b="0" dirty="0"/>
-              <a:t>==NULL){</a:t>
-            </a:r>
-          </a:p>
-          <a:p>
-            <a:pPr marL="0" indent="0">
-              <a:lnSpc>
-                <a:spcPct val="100000"/>
-              </a:lnSpc>
-              <a:buNone/>
-            </a:pPr>
-            <a:r>
-              <a:rPr lang="en-US" altLang="zh-CN" b="0" dirty="0"/>
-              <a:t>        return ERROR;</a:t>
-            </a:r>
-          </a:p>
-          <a:p>
-            <a:pPr marL="0" indent="0">
-              <a:lnSpc>
-                <a:spcPct val="100000"/>
-              </a:lnSpc>
-              <a:buNone/>
-            </a:pPr>
-            <a:r>
-              <a:rPr lang="en-US" altLang="zh-CN" b="0" dirty="0"/>
-              <a:t>    }</a:t>
+              <a:t>elemSize</a:t>
+            </a:r>
+            <a:r>
+              <a:rPr lang="en-US" altLang="zh-CN" b="0" dirty="0"/>
+              <a:t>=</a:t>
+            </a:r>
+            <a:r>
+              <a:rPr lang="en-US" altLang="zh-CN" b="0" dirty="0" err="1"/>
+              <a:t>elemSize</a:t>
+            </a:r>
+            <a:r>
+              <a:rPr lang="en-US" altLang="zh-CN" b="0" dirty="0"/>
+              <a:t>;</a:t>
             </a:r>
           </a:p>
           <a:p>
@@ -5625,47 +5710,11 @@
             </a:r>
             <a:r>
               <a:rPr lang="en-US" altLang="zh-CN" b="0" dirty="0" err="1"/>
-              <a:t>pTop</a:t>
-            </a:r>
-            <a:r>
-              <a:rPr lang="en-US" altLang="zh-CN" b="0" dirty="0"/>
-              <a:t>=</a:t>
-            </a:r>
-            <a:r>
-              <a:rPr lang="en-US" altLang="zh-CN" b="0" dirty="0" err="1"/>
-              <a:t>pStack</a:t>
-            </a:r>
-            <a:r>
-              <a:rPr lang="en-US" altLang="zh-CN" b="0" dirty="0"/>
-              <a:t>-&gt;</a:t>
-            </a:r>
-            <a:r>
-              <a:rPr lang="en-US" altLang="zh-CN" b="0" dirty="0" err="1"/>
-              <a:t>pBase</a:t>
-            </a:r>
-            <a:r>
-              <a:rPr lang="en-US" altLang="zh-CN" b="0" dirty="0"/>
-              <a:t>;</a:t>
-            </a:r>
-          </a:p>
-          <a:p>
-            <a:pPr marL="0" indent="0">
-              <a:lnSpc>
-                <a:spcPct val="100000"/>
-              </a:lnSpc>
-              <a:buNone/>
-            </a:pPr>
-            <a:r>
-              <a:rPr lang="en-US" altLang="zh-CN" b="0" dirty="0"/>
-              <a:t>    </a:t>
-            </a:r>
-            <a:r>
-              <a:rPr lang="en-US" altLang="zh-CN" b="0" dirty="0" err="1"/>
-              <a:t>pStack</a:t>
-            </a:r>
-            <a:r>
-              <a:rPr lang="en-US" altLang="zh-CN" b="0" dirty="0"/>
-              <a:t>-&gt;size=STACK_INIT_SIZE;</a:t>
+              <a:t>stackSize</a:t>
+            </a:r>
+            <a:r>
+              <a:rPr lang="en-US" altLang="zh-CN" b="0" dirty="0"/>
+              <a:t>=STACK_INIT_SIZE;</a:t>
             </a:r>
           </a:p>
           <a:p>
@@ -5811,15 +5860,7 @@
             </a:r>
             <a:r>
               <a:rPr lang="en-US" altLang="zh-CN" b="0" dirty="0"/>
-              <a:t>, Status (*</a:t>
-            </a:r>
-            <a:r>
-              <a:rPr lang="en-US" altLang="zh-CN" b="0" dirty="0" err="1"/>
-              <a:t>freeData</a:t>
-            </a:r>
-            <a:r>
-              <a:rPr lang="en-US" altLang="zh-CN" b="0" dirty="0"/>
-              <a:t>)()) {</a:t>
+              <a:t> ) {</a:t>
             </a:r>
           </a:p>
           <a:p>
@@ -5839,7 +5880,31 @@
             </a:r>
             <a:r>
               <a:rPr lang="en-US" altLang="zh-CN" b="0" dirty="0"/>
-              <a:t>, n;</a:t>
+              <a:t>, n=</a:t>
+            </a:r>
+            <a:r>
+              <a:rPr lang="en-US" altLang="zh-CN" b="0" dirty="0" err="1"/>
+              <a:t>pStack</a:t>
+            </a:r>
+            <a:r>
+              <a:rPr lang="en-US" altLang="zh-CN" b="0" dirty="0"/>
+              <a:t>-&gt;</a:t>
+            </a:r>
+            <a:r>
+              <a:rPr lang="en-US" altLang="zh-CN" b="0" dirty="0" err="1"/>
+              <a:t>pTop-pStack</a:t>
+            </a:r>
+            <a:r>
+              <a:rPr lang="en-US" altLang="zh-CN" b="0" dirty="0"/>
+              <a:t>-&gt;</a:t>
+            </a:r>
+            <a:r>
+              <a:rPr lang="en-US" altLang="zh-CN" b="0" dirty="0" err="1"/>
+              <a:t>pBase</a:t>
+            </a:r>
+            <a:r>
+              <a:rPr lang="en-US" altLang="zh-CN" b="0" dirty="0"/>
+              <a:t>;</a:t>
             </a:r>
           </a:p>
           <a:p>
@@ -5851,7 +5916,43 @@
             </a:pPr>
             <a:r>
               <a:rPr lang="en-US" altLang="zh-CN" b="0" dirty="0"/>
-              <a:t>    n=</a:t>
+              <a:t>    for(</a:t>
+            </a:r>
+            <a:r>
+              <a:rPr lang="en-US" altLang="zh-CN" b="0" dirty="0" err="1"/>
+              <a:t>i</a:t>
+            </a:r>
+            <a:r>
+              <a:rPr lang="en-US" altLang="zh-CN" b="0" dirty="0"/>
+              <a:t>=0; </a:t>
+            </a:r>
+            <a:r>
+              <a:rPr lang="en-US" altLang="zh-CN" b="0" dirty="0" err="1"/>
+              <a:t>i</a:t>
+            </a:r>
+            <a:r>
+              <a:rPr lang="en-US" altLang="zh-CN" b="0" dirty="0"/>
+              <a:t>&lt;n; </a:t>
+            </a:r>
+            <a:r>
+              <a:rPr lang="en-US" altLang="zh-CN" b="0" dirty="0" err="1"/>
+              <a:t>i</a:t>
+            </a:r>
+            <a:r>
+              <a:rPr lang="en-US" altLang="zh-CN" b="0" dirty="0"/>
+              <a:t>++) {</a:t>
+            </a:r>
+          </a:p>
+          <a:p>
+            <a:pPr marL="0" indent="0">
+              <a:lnSpc>
+                <a:spcPct val="90000"/>
+              </a:lnSpc>
+              <a:buNone/>
+            </a:pPr>
+            <a:r>
+              <a:rPr lang="en-US" altLang="zh-CN" b="0" dirty="0"/>
+              <a:t>        free(</a:t>
             </a:r>
             <a:r>
               <a:rPr lang="en-US" altLang="zh-CN" b="0" dirty="0" err="1"/>
@@ -5863,7 +5964,47 @@
             </a:r>
             <a:r>
               <a:rPr lang="en-US" altLang="zh-CN" b="0" dirty="0" err="1"/>
-              <a:t>pTop-pStack</a:t>
+              <a:t>pBase</a:t>
+            </a:r>
+            <a:r>
+              <a:rPr lang="en-US" altLang="zh-CN" b="0" dirty="0"/>
+              <a:t>[</a:t>
+            </a:r>
+            <a:r>
+              <a:rPr lang="en-US" altLang="zh-CN" b="0" dirty="0" err="1"/>
+              <a:t>i</a:t>
+            </a:r>
+            <a:r>
+              <a:rPr lang="en-US" altLang="zh-CN" b="0" dirty="0"/>
+              <a:t>]);</a:t>
+            </a:r>
+          </a:p>
+          <a:p>
+            <a:pPr marL="0" indent="0">
+              <a:lnSpc>
+                <a:spcPct val="90000"/>
+              </a:lnSpc>
+              <a:buNone/>
+            </a:pPr>
+            <a:r>
+              <a:rPr lang="en-US" altLang="zh-CN" b="0" dirty="0"/>
+              <a:t>    }</a:t>
+            </a:r>
+          </a:p>
+          <a:p>
+            <a:pPr marL="0" indent="0">
+              <a:lnSpc>
+                <a:spcPct val="90000"/>
+              </a:lnSpc>
+              <a:buNone/>
+            </a:pPr>
+            <a:r>
+              <a:rPr lang="en-US" altLang="zh-CN" b="0" dirty="0"/>
+              <a:t>    free(</a:t>
+            </a:r>
+            <a:r>
+              <a:rPr lang="en-US" altLang="zh-CN" b="0" dirty="0" err="1"/>
+              <a:t>pStack</a:t>
             </a:r>
             <a:r>
               <a:rPr lang="en-US" altLang="zh-CN" b="0" dirty="0"/>
@@ -5875,6 +6016,42 @@
             </a:r>
             <a:r>
               <a:rPr lang="en-US" altLang="zh-CN" b="0" dirty="0"/>
+              <a:t>);</a:t>
+            </a:r>
+          </a:p>
+          <a:p>
+            <a:pPr marL="0" indent="0">
+              <a:lnSpc>
+                <a:spcPct val="90000"/>
+              </a:lnSpc>
+              <a:buNone/>
+            </a:pPr>
+            <a:r>
+              <a:rPr lang="en-US" altLang="zh-CN" b="0" dirty="0"/>
+              <a:t>    </a:t>
+            </a:r>
+            <a:r>
+              <a:rPr lang="en-US" altLang="zh-CN" b="0" dirty="0" err="1"/>
+              <a:t>pStack</a:t>
+            </a:r>
+            <a:r>
+              <a:rPr lang="en-US" altLang="zh-CN" b="0" dirty="0"/>
+              <a:t>-&gt;</a:t>
+            </a:r>
+            <a:r>
+              <a:rPr lang="en-US" altLang="zh-CN" b="0" dirty="0" err="1"/>
+              <a:t>pBase</a:t>
+            </a:r>
+            <a:r>
+              <a:rPr lang="en-US" altLang="zh-CN" b="0" dirty="0"/>
+              <a:t>=</a:t>
+            </a:r>
+            <a:r>
+              <a:rPr lang="en-US" altLang="zh-CN" b="0" dirty="0" err="1"/>
+              <a:t>nullptr</a:t>
+            </a:r>
+            <a:r>
+              <a:rPr lang="en-US" altLang="zh-CN" b="0" dirty="0"/>
               <a:t>;</a:t>
             </a:r>
           </a:p>
@@ -5887,31 +6064,31 @@
             </a:pPr>
             <a:r>
               <a:rPr lang="en-US" altLang="zh-CN" b="0" dirty="0"/>
-              <a:t>    for(</a:t>
-            </a:r>
-            <a:r>
-              <a:rPr lang="en-US" altLang="zh-CN" b="0" dirty="0" err="1"/>
-              <a:t>i</a:t>
-            </a:r>
-            <a:r>
-              <a:rPr lang="en-US" altLang="zh-CN" b="0" dirty="0"/>
-              <a:t>=0; </a:t>
-            </a:r>
-            <a:r>
-              <a:rPr lang="en-US" altLang="zh-CN" b="0" dirty="0" err="1"/>
-              <a:t>i</a:t>
-            </a:r>
-            <a:r>
-              <a:rPr lang="en-US" altLang="zh-CN" b="0" dirty="0"/>
-              <a:t>&lt;n; </a:t>
-            </a:r>
-            <a:r>
-              <a:rPr lang="en-US" altLang="zh-CN" b="0" dirty="0" err="1"/>
-              <a:t>i</a:t>
-            </a:r>
-            <a:r>
-              <a:rPr lang="en-US" altLang="zh-CN" b="0" dirty="0"/>
-              <a:t>++) {</a:t>
+              <a:t>    </a:t>
+            </a:r>
+            <a:r>
+              <a:rPr lang="en-US" altLang="zh-CN" b="0" dirty="0" err="1"/>
+              <a:t>pStack</a:t>
+            </a:r>
+            <a:r>
+              <a:rPr lang="en-US" altLang="zh-CN" b="0" dirty="0"/>
+              <a:t>-&gt;</a:t>
+            </a:r>
+            <a:r>
+              <a:rPr lang="en-US" altLang="zh-CN" b="0" dirty="0" err="1"/>
+              <a:t>pTop</a:t>
+            </a:r>
+            <a:r>
+              <a:rPr lang="en-US" altLang="zh-CN" b="0" dirty="0"/>
+              <a:t>=</a:t>
+            </a:r>
+            <a:r>
+              <a:rPr lang="en-US" altLang="zh-CN" b="0" dirty="0" err="1"/>
+              <a:t>nullptr</a:t>
+            </a:r>
+            <a:r>
+              <a:rPr lang="en-US" altLang="zh-CN" b="0" dirty="0"/>
+              <a:t>;</a:t>
             </a:r>
           </a:p>
           <a:p>
@@ -5923,15 +6100,7 @@
             </a:pPr>
             <a:r>
               <a:rPr lang="en-US" altLang="zh-CN" b="0" dirty="0"/>
-              <a:t>        </a:t>
-            </a:r>
-            <a:r>
-              <a:rPr lang="en-US" altLang="zh-CN" b="0" dirty="0" err="1"/>
-              <a:t>freeData</a:t>
-            </a:r>
-            <a:r>
-              <a:rPr lang="en-US" altLang="zh-CN" b="0" dirty="0"/>
-              <a:t>(</a:t>
+              <a:t>    </a:t>
             </a:r>
             <a:r>
               <a:rPr lang="en-US" altLang="zh-CN" b="0" dirty="0" err="1"/>
@@ -5943,19 +6112,11 @@
             </a:r>
             <a:r>
               <a:rPr lang="en-US" altLang="zh-CN" b="0" dirty="0" err="1"/>
-              <a:t>pBase</a:t>
-            </a:r>
-            <a:r>
-              <a:rPr lang="en-US" altLang="zh-CN" b="0" dirty="0"/>
-              <a:t>[</a:t>
-            </a:r>
-            <a:r>
-              <a:rPr lang="en-US" altLang="zh-CN" b="0" dirty="0" err="1"/>
-              <a:t>i</a:t>
-            </a:r>
-            <a:r>
-              <a:rPr lang="en-US" altLang="zh-CN" b="0" dirty="0"/>
-              <a:t>]);</a:t>
+              <a:t>elemSize</a:t>
+            </a:r>
+            <a:r>
+              <a:rPr lang="en-US" altLang="zh-CN" b="0" dirty="0"/>
+              <a:t>=0;</a:t>
             </a:r>
           </a:p>
           <a:p>
@@ -5967,19 +6128,7 @@
             </a:pPr>
             <a:r>
               <a:rPr lang="en-US" altLang="zh-CN" b="0" dirty="0"/>
-              <a:t>    }</a:t>
-            </a:r>
-          </a:p>
-          <a:p>
-            <a:pPr marL="0" indent="0">
-              <a:lnSpc>
-                <a:spcPct val="90000"/>
-              </a:lnSpc>
-              <a:buNone/>
-            </a:pPr>
-            <a:r>
-              <a:rPr lang="en-US" altLang="zh-CN" b="0" dirty="0"/>
-              <a:t>    free(</a:t>
+              <a:t>    </a:t>
             </a:r>
             <a:r>
               <a:rPr lang="en-US" altLang="zh-CN" b="0" dirty="0" err="1"/>
@@ -5991,87 +6140,11 @@
             </a:r>
             <a:r>
               <a:rPr lang="en-US" altLang="zh-CN" b="0" dirty="0" err="1"/>
-              <a:t>pBase</a:t>
-            </a:r>
-            <a:r>
-              <a:rPr lang="en-US" altLang="zh-CN" b="0" dirty="0"/>
-              <a:t>);</a:t>
-            </a:r>
-          </a:p>
-          <a:p>
-            <a:pPr marL="0" indent="0">
-              <a:lnSpc>
-                <a:spcPct val="90000"/>
-              </a:lnSpc>
-              <a:buNone/>
-            </a:pPr>
-            <a:r>
-              <a:rPr lang="en-US" altLang="zh-CN" b="0" dirty="0"/>
-              <a:t>    </a:t>
-            </a:r>
-            <a:r>
-              <a:rPr lang="en-US" altLang="zh-CN" b="0" dirty="0" err="1"/>
-              <a:t>pStack</a:t>
-            </a:r>
-            <a:r>
-              <a:rPr lang="en-US" altLang="zh-CN" b="0" dirty="0"/>
-              <a:t>-&gt;</a:t>
-            </a:r>
-            <a:r>
-              <a:rPr lang="en-US" altLang="zh-CN" b="0" dirty="0" err="1"/>
-              <a:t>pBase</a:t>
-            </a:r>
-            <a:r>
-              <a:rPr lang="en-US" altLang="zh-CN" b="0" dirty="0"/>
-              <a:t>=NULL;</a:t>
-            </a:r>
-          </a:p>
-          <a:p>
-            <a:pPr marL="0" indent="0">
-              <a:lnSpc>
-                <a:spcPct val="90000"/>
-              </a:lnSpc>
-              <a:buNone/>
-            </a:pPr>
-            <a:r>
-              <a:rPr lang="en-US" altLang="zh-CN" b="0" dirty="0"/>
-              <a:t>    </a:t>
-            </a:r>
-            <a:r>
-              <a:rPr lang="en-US" altLang="zh-CN" b="0" dirty="0" err="1"/>
-              <a:t>pStack</a:t>
-            </a:r>
-            <a:r>
-              <a:rPr lang="en-US" altLang="zh-CN" b="0" dirty="0"/>
-              <a:t>-&gt;</a:t>
-            </a:r>
-            <a:r>
-              <a:rPr lang="en-US" altLang="zh-CN" b="0" dirty="0" err="1"/>
-              <a:t>pTop</a:t>
-            </a:r>
-            <a:r>
-              <a:rPr lang="en-US" altLang="zh-CN" b="0" dirty="0"/>
-              <a:t>=NULL;</a:t>
-            </a:r>
-          </a:p>
-          <a:p>
-            <a:pPr marL="0" indent="0">
-              <a:lnSpc>
-                <a:spcPct val="90000"/>
-              </a:lnSpc>
-              <a:buNone/>
-            </a:pPr>
-            <a:r>
-              <a:rPr lang="en-US" altLang="zh-CN" b="0" dirty="0"/>
-              <a:t>    </a:t>
-            </a:r>
-            <a:r>
-              <a:rPr lang="en-US" altLang="zh-CN" b="0" dirty="0" err="1"/>
-              <a:t>pStack</a:t>
-            </a:r>
-            <a:r>
-              <a:rPr lang="en-US" altLang="zh-CN" b="0" dirty="0"/>
-              <a:t>-&gt;size=0;</a:t>
+              <a:t>stackSize</a:t>
+            </a:r>
+            <a:r>
+              <a:rPr lang="en-US" altLang="zh-CN" b="0" dirty="0"/>
+              <a:t>=0;</a:t>
             </a:r>
           </a:p>
           <a:p>
@@ -6212,15 +6285,7 @@
             </a:r>
             <a:r>
               <a:rPr lang="en-US" altLang="zh-CN" b="0" dirty="0"/>
-              <a:t>, Status (*</a:t>
-            </a:r>
-            <a:r>
-              <a:rPr lang="en-US" altLang="zh-CN" b="0" dirty="0" err="1"/>
-              <a:t>freeData</a:t>
-            </a:r>
-            <a:r>
-              <a:rPr lang="en-US" altLang="zh-CN" b="0" dirty="0"/>
-              <a:t>)()) {</a:t>
+              <a:t>) {</a:t>
             </a:r>
           </a:p>
           <a:p>
@@ -6247,134 +6312,6 @@
             <a:pPr marL="0" indent="0">
               <a:lnSpc>
                 <a:spcPct val="90000"/>
-              </a:lnSpc>
-              <a:buNone/>
-            </a:pPr>
-            <a:r>
-              <a:rPr lang="en-US" altLang="zh-CN" b="0" dirty="0"/>
-              <a:t>    n=</a:t>
-            </a:r>
-            <a:r>
-              <a:rPr lang="en-US" altLang="zh-CN" b="0" dirty="0" err="1"/>
-              <a:t>pStack</a:t>
-            </a:r>
-            <a:r>
-              <a:rPr lang="en-US" altLang="zh-CN" b="0" dirty="0"/>
-              <a:t>-&gt;</a:t>
-            </a:r>
-            <a:r>
-              <a:rPr lang="en-US" altLang="zh-CN" b="0" dirty="0" err="1"/>
-              <a:t>pTop-pStack</a:t>
-            </a:r>
-            <a:r>
-              <a:rPr lang="en-US" altLang="zh-CN" b="0" dirty="0"/>
-              <a:t>-&gt;</a:t>
-            </a:r>
-            <a:r>
-              <a:rPr lang="en-US" altLang="zh-CN" b="0" dirty="0" err="1"/>
-              <a:t>pBase</a:t>
-            </a:r>
-            <a:r>
-              <a:rPr lang="en-US" altLang="zh-CN" b="0" dirty="0"/>
-              <a:t>;</a:t>
-            </a:r>
-          </a:p>
-          <a:p>
-            <a:pPr marL="0" indent="0">
-              <a:lnSpc>
-                <a:spcPct val="90000"/>
-              </a:lnSpc>
-              <a:buNone/>
-            </a:pPr>
-            <a:r>
-              <a:rPr lang="en-US" altLang="zh-CN" b="0" dirty="0"/>
-              <a:t>    for(</a:t>
-            </a:r>
-            <a:r>
-              <a:rPr lang="en-US" altLang="zh-CN" b="0" dirty="0" err="1"/>
-              <a:t>i</a:t>
-            </a:r>
-            <a:r>
-              <a:rPr lang="en-US" altLang="zh-CN" b="0" dirty="0"/>
-              <a:t>=0; </a:t>
-            </a:r>
-            <a:r>
-              <a:rPr lang="en-US" altLang="zh-CN" b="0" dirty="0" err="1"/>
-              <a:t>i</a:t>
-            </a:r>
-            <a:r>
-              <a:rPr lang="en-US" altLang="zh-CN" b="0" dirty="0"/>
-              <a:t>&lt;n; </a:t>
-            </a:r>
-            <a:r>
-              <a:rPr lang="en-US" altLang="zh-CN" b="0" dirty="0" err="1"/>
-              <a:t>i</a:t>
-            </a:r>
-            <a:r>
-              <a:rPr lang="en-US" altLang="zh-CN" b="0" dirty="0"/>
-              <a:t>++) {</a:t>
-            </a:r>
-          </a:p>
-          <a:p>
-            <a:pPr marL="0" indent="0">
-              <a:lnSpc>
-                <a:spcPct val="90000"/>
-              </a:lnSpc>
-              <a:buNone/>
-            </a:pPr>
-            <a:r>
-              <a:rPr lang="en-US" altLang="zh-CN" b="0" dirty="0"/>
-              <a:t>        </a:t>
-            </a:r>
-            <a:r>
-              <a:rPr lang="en-US" altLang="zh-CN" b="0" dirty="0" err="1"/>
-              <a:t>freeData</a:t>
-            </a:r>
-            <a:r>
-              <a:rPr lang="en-US" altLang="zh-CN" b="0" dirty="0"/>
-              <a:t>(</a:t>
-            </a:r>
-            <a:r>
-              <a:rPr lang="en-US" altLang="zh-CN" b="0" dirty="0" err="1"/>
-              <a:t>pStack</a:t>
-            </a:r>
-            <a:r>
-              <a:rPr lang="en-US" altLang="zh-CN" b="0" dirty="0"/>
-              <a:t>-&gt;</a:t>
-            </a:r>
-            <a:r>
-              <a:rPr lang="en-US" altLang="zh-CN" b="0" dirty="0" err="1"/>
-              <a:t>pBase</a:t>
-            </a:r>
-            <a:r>
-              <a:rPr lang="en-US" altLang="zh-CN" b="0" dirty="0"/>
-              <a:t>[</a:t>
-            </a:r>
-            <a:r>
-              <a:rPr lang="en-US" altLang="zh-CN" b="0" dirty="0" err="1"/>
-              <a:t>i</a:t>
-            </a:r>
-            <a:r>
-              <a:rPr lang="en-US" altLang="zh-CN" b="0" dirty="0"/>
-              <a:t>]);</a:t>
-            </a:r>
-          </a:p>
-          <a:p>
-            <a:pPr marL="0" indent="0">
-              <a:lnSpc>
-                <a:spcPct val="90000"/>
-              </a:lnSpc>
-              <a:buNone/>
-            </a:pPr>
-            <a:r>
-              <a:rPr lang="en-US" altLang="zh-CN" b="0" dirty="0"/>
-              <a:t>    }</a:t>
-            </a:r>
-          </a:p>
-          <a:p>
-            <a:pPr marL="0" indent="0">
-              <a:lnSpc>
-                <a:spcPct val="100000"/>
               </a:lnSpc>
               <a:buNone/>
             </a:pPr>
@@ -6712,12 +6649,8 @@
               <a:buNone/>
             </a:pPr>
             <a:r>
-              <a:rPr lang="en-US" altLang="zh-CN" b="0" dirty="0" err="1"/>
-              <a:t>YesNo</a:t>
-            </a:r>
-            <a:r>
-              <a:rPr lang="en-US" altLang="zh-CN" b="0" dirty="0"/>
-              <a:t>  </a:t>
+              <a:rPr lang="en-US" altLang="zh-CN" b="0" dirty="0"/>
+              <a:t>bool  </a:t>
             </a:r>
             <a:r>
               <a:rPr lang="en-US" altLang="zh-CN" b="0" dirty="0" err="1"/>
@@ -6789,7 +6722,7 @@
             </a:pPr>
             <a:r>
               <a:rPr lang="en-US" altLang="zh-CN" b="0" dirty="0"/>
-              <a:t>        return YES;</a:t>
+              <a:t>        return true;</a:t>
             </a:r>
           </a:p>
           <a:p>
@@ -6825,7 +6758,7 @@
             </a:pPr>
             <a:r>
               <a:rPr lang="en-US" altLang="zh-CN" b="0" dirty="0"/>
-              <a:t>        return NO;</a:t>
+              <a:t>        return false;</a:t>
             </a:r>
           </a:p>
           <a:p>
@@ -7115,15 +7048,7 @@
             </a:pPr>
             <a:r>
               <a:rPr lang="en-US" altLang="zh-CN" b="0" dirty="0"/>
-              <a:t>Status </a:t>
-            </a:r>
-            <a:r>
-              <a:rPr lang="en-US" altLang="zh-CN" b="0" dirty="0" err="1"/>
-              <a:t>GetTop</a:t>
-            </a:r>
-            <a:r>
-              <a:rPr lang="en-US" altLang="zh-CN" b="0" dirty="0"/>
-              <a:t>(Stack* </a:t>
+              <a:t>Status Peek(Stack* </a:t>
             </a:r>
             <a:r>
               <a:rPr lang="en-US" altLang="zh-CN" b="0" dirty="0" err="1"/>
@@ -7131,19 +7056,11 @@
             </a:r>
             <a:r>
               <a:rPr lang="en-US" altLang="zh-CN" b="0" dirty="0"/>
-              <a:t>, </a:t>
-            </a:r>
-            <a:r>
-              <a:rPr lang="en-US" altLang="zh-CN" b="0" dirty="0" err="1"/>
-              <a:t>GenericPointer</a:t>
-            </a:r>
-            <a:r>
-              <a:rPr lang="en-US" altLang="zh-CN" b="0" dirty="0"/>
-              <a:t>* </a:t>
-            </a:r>
-            <a:r>
-              <a:rPr lang="en-US" altLang="zh-CN" b="0" dirty="0" err="1"/>
-              <a:t>ppData</a:t>
+              <a:t>, void* </a:t>
+            </a:r>
+            <a:r>
+              <a:rPr lang="en-US" altLang="zh-CN" b="0" dirty="0" err="1"/>
+              <a:t>pData</a:t>
             </a:r>
             <a:r>
               <a:rPr lang="en-US" altLang="zh-CN" b="0" dirty="0"/>
@@ -7175,7 +7092,7 @@
             </a:r>
             <a:r>
               <a:rPr lang="en-US" altLang="zh-CN" b="0" dirty="0"/>
-              <a:t>)==YES) {</a:t>
+              <a:t>)==true) {</a:t>
             </a:r>
           </a:p>
           <a:p>
@@ -7211,11 +7128,11 @@
             </a:pPr>
             <a:r>
               <a:rPr lang="en-US" altLang="zh-CN" b="0" dirty="0"/>
-              <a:t>    *</a:t>
-            </a:r>
-            <a:r>
-              <a:rPr lang="en-US" altLang="zh-CN" b="0" dirty="0" err="1"/>
-              <a:t>ppData</a:t>
+              <a:t>    // *</a:t>
+            </a:r>
+            <a:r>
+              <a:rPr lang="en-US" altLang="zh-CN" b="0" dirty="0" err="1"/>
+              <a:t>pData</a:t>
             </a:r>
             <a:r>
               <a:rPr lang="en-US" altLang="zh-CN" b="0" dirty="0"/>
@@ -7365,7 +7282,27 @@
             </a:r>
             <a:r>
               <a:rPr lang="en-US" altLang="zh-CN" b="0" dirty="0"/>
-              <a:t>, </a:t>
+              <a:t>, void* </a:t>
+            </a:r>
+            <a:r>
+              <a:rPr lang="en-US" altLang="zh-CN" b="0" dirty="0" err="1"/>
+              <a:t>pData</a:t>
+            </a:r>
+            <a:r>
+              <a:rPr lang="en-US" altLang="zh-CN" b="0" dirty="0"/>
+              <a:t>) {</a:t>
+            </a:r>
+          </a:p>
+          <a:p>
+            <a:pPr marL="0" indent="0">
+              <a:lnSpc>
+                <a:spcPct val="100000"/>
+              </a:lnSpc>
+              <a:buNone/>
+            </a:pPr>
+            <a:r>
+              <a:rPr lang="en-US" altLang="zh-CN" b="0" dirty="0"/>
+              <a:t>    </a:t>
             </a:r>
             <a:r>
               <a:rPr lang="en-US" altLang="zh-CN" b="0" dirty="0" err="1"/>
@@ -7373,27 +7310,71 @@
             </a:r>
             <a:r>
               <a:rPr lang="en-US" altLang="zh-CN" b="0" dirty="0"/>
-              <a:t> </a:t>
-            </a:r>
-            <a:r>
-              <a:rPr lang="en-US" altLang="zh-CN" b="0" dirty="0" err="1"/>
-              <a:t>pData</a:t>
-            </a:r>
-            <a:r>
-              <a:rPr lang="en-US" altLang="zh-CN" b="0" dirty="0"/>
-              <a:t>) {</a:t>
-            </a:r>
-          </a:p>
-          <a:p>
-            <a:pPr marL="0" indent="0">
-              <a:lnSpc>
-                <a:spcPct val="100000"/>
-              </a:lnSpc>
-              <a:buNone/>
-            </a:pPr>
-            <a:r>
-              <a:rPr lang="en-US" altLang="zh-CN" b="0" dirty="0"/>
-              <a:t>    </a:t>
+              <a:t>* </a:t>
+            </a:r>
+            <a:r>
+              <a:rPr lang="en-US" altLang="zh-CN" b="0" dirty="0" err="1"/>
+              <a:t>pBase</a:t>
+            </a:r>
+            <a:r>
+              <a:rPr lang="en-US" altLang="zh-CN" b="0" dirty="0"/>
+              <a:t>;</a:t>
+            </a:r>
+          </a:p>
+          <a:p>
+            <a:pPr marL="0" indent="0">
+              <a:lnSpc>
+                <a:spcPct val="100000"/>
+              </a:lnSpc>
+              <a:buNone/>
+            </a:pPr>
+            <a:r>
+              <a:rPr lang="en-US" altLang="zh-CN" b="0" dirty="0"/>
+              <a:t>    if (</a:t>
+            </a:r>
+            <a:r>
+              <a:rPr lang="en-US" altLang="zh-CN" b="0" dirty="0" err="1"/>
+              <a:t>LengthOfStack</a:t>
+            </a:r>
+            <a:r>
+              <a:rPr lang="en-US" altLang="zh-CN" b="0" dirty="0"/>
+              <a:t>(</a:t>
+            </a:r>
+            <a:r>
+              <a:rPr lang="en-US" altLang="zh-CN" b="0" dirty="0" err="1"/>
+              <a:t>pStack</a:t>
+            </a:r>
+            <a:r>
+              <a:rPr lang="en-US" altLang="zh-CN" b="0" dirty="0"/>
+              <a:t>)&gt;=</a:t>
+            </a:r>
+            <a:r>
+              <a:rPr lang="en-US" altLang="zh-CN" b="0" dirty="0" err="1"/>
+              <a:t>pStack</a:t>
+            </a:r>
+            <a:r>
+              <a:rPr lang="en-US" altLang="zh-CN" b="0" dirty="0"/>
+              <a:t>-&gt;size) {</a:t>
+            </a:r>
+          </a:p>
+          <a:p>
+            <a:pPr marL="0" indent="0">
+              <a:lnSpc>
+                <a:spcPct val="100000"/>
+              </a:lnSpc>
+              <a:buNone/>
+            </a:pPr>
+            <a:r>
+              <a:rPr lang="en-US" altLang="zh-CN" b="0" dirty="0"/>
+              <a:t>        </a:t>
+            </a:r>
+            <a:r>
+              <a:rPr lang="en-US" altLang="zh-CN" b="0" dirty="0" err="1"/>
+              <a:t>pBase</a:t>
+            </a:r>
+            <a:r>
+              <a:rPr lang="en-US" altLang="zh-CN" b="0" dirty="0"/>
+              <a:t>=(</a:t>
             </a:r>
             <a:r>
               <a:rPr lang="en-US" altLang="zh-CN" b="0" dirty="0" err="1"/>
@@ -7401,7 +7382,35 @@
             </a:r>
             <a:r>
               <a:rPr lang="en-US" altLang="zh-CN" b="0" dirty="0"/>
-              <a:t>* </a:t>
+              <a:t>*)</a:t>
+            </a:r>
+            <a:r>
+              <a:rPr lang="en-US" altLang="zh-CN" b="0" dirty="0" err="1"/>
+              <a:t>realloc</a:t>
+            </a:r>
+            <a:r>
+              <a:rPr lang="en-US" altLang="zh-CN" b="0" dirty="0"/>
+              <a:t>(</a:t>
+            </a:r>
+          </a:p>
+          <a:p>
+            <a:pPr marL="0" indent="0">
+              <a:lnSpc>
+                <a:spcPct val="100000"/>
+              </a:lnSpc>
+              <a:buNone/>
+            </a:pPr>
+            <a:r>
+              <a:rPr lang="en-US" altLang="zh-CN" b="0" dirty="0"/>
+              <a:t>                       </a:t>
+            </a:r>
+            <a:r>
+              <a:rPr lang="en-US" altLang="zh-CN" b="0" dirty="0" err="1"/>
+              <a:t>pStack</a:t>
+            </a:r>
+            <a:r>
+              <a:rPr lang="en-US" altLang="zh-CN" b="0" dirty="0"/>
+              <a:t>-&gt;</a:t>
             </a:r>
             <a:r>
               <a:rPr lang="en-US" altLang="zh-CN" b="0" dirty="0" err="1"/>
@@ -7409,23 +7418,51 @@
             </a:r>
             <a:r>
               <a:rPr lang="en-US" altLang="zh-CN" b="0" dirty="0"/>
-              <a:t>;</a:t>
-            </a:r>
-          </a:p>
-          <a:p>
-            <a:pPr marL="0" indent="0">
-              <a:lnSpc>
-                <a:spcPct val="100000"/>
-              </a:lnSpc>
-              <a:buNone/>
-            </a:pPr>
-            <a:r>
-              <a:rPr lang="en-US" altLang="zh-CN" b="0" dirty="0"/>
-              <a:t>    if (</a:t>
-            </a:r>
-            <a:r>
-              <a:rPr lang="en-US" altLang="zh-CN" b="0" dirty="0" err="1"/>
-              <a:t>LengthOfStack</a:t>
+              <a:t>,</a:t>
+            </a:r>
+          </a:p>
+          <a:p>
+            <a:pPr marL="0" indent="0">
+              <a:lnSpc>
+                <a:spcPct val="100000"/>
+              </a:lnSpc>
+              <a:buNone/>
+            </a:pPr>
+            <a:r>
+              <a:rPr lang="en-US" altLang="zh-CN" b="0" dirty="0"/>
+              <a:t>                       (</a:t>
+            </a:r>
+            <a:r>
+              <a:rPr lang="en-US" altLang="zh-CN" b="0" dirty="0" err="1"/>
+              <a:t>pStack</a:t>
+            </a:r>
+            <a:r>
+              <a:rPr lang="en-US" altLang="zh-CN" b="0" dirty="0"/>
+              <a:t>-&gt;</a:t>
+            </a:r>
+            <a:r>
+              <a:rPr lang="en-US" altLang="zh-CN" b="0" dirty="0" err="1"/>
+              <a:t>size+STACK_INCREMENT</a:t>
+            </a:r>
+            <a:r>
+              <a:rPr lang="en-US" altLang="zh-CN" b="0" dirty="0"/>
+              <a:t>)*</a:t>
+            </a:r>
+          </a:p>
+          <a:p>
+            <a:pPr marL="0" indent="0">
+              <a:lnSpc>
+                <a:spcPct val="100000"/>
+              </a:lnSpc>
+              <a:buNone/>
+            </a:pPr>
+            <a:r>
+              <a:rPr lang="en-US" altLang="zh-CN" b="0" dirty="0"/>
+              <a:t>                                               </a:t>
+            </a:r>
+            <a:r>
+              <a:rPr lang="en-US" altLang="zh-CN" b="0" dirty="0" err="1"/>
+              <a:t>sizeof</a:t>
             </a:r>
             <a:r>
               <a:rPr lang="en-US" altLang="zh-CN" b="0" dirty="0"/>
@@ -7433,31 +7470,23 @@
             </a:r>
             <a:r>
               <a:rPr lang="en-US" altLang="zh-CN" b="0" dirty="0" err="1"/>
-              <a:t>pStack</a:t>
-            </a:r>
-            <a:r>
-              <a:rPr lang="en-US" altLang="zh-CN" b="0" dirty="0"/>
-              <a:t>)&gt;=</a:t>
-            </a:r>
-            <a:r>
-              <a:rPr lang="en-US" altLang="zh-CN" b="0" dirty="0" err="1"/>
-              <a:t>pStack</a:t>
-            </a:r>
-            <a:r>
-              <a:rPr lang="en-US" altLang="zh-CN" b="0" dirty="0"/>
-              <a:t>-&gt;size) {</a:t>
-            </a:r>
-          </a:p>
-          <a:p>
-            <a:pPr marL="0" indent="0">
-              <a:lnSpc>
-                <a:spcPct val="100000"/>
-              </a:lnSpc>
-              <a:buNone/>
-            </a:pPr>
-            <a:r>
-              <a:rPr lang="en-US" altLang="zh-CN" b="0" dirty="0"/>
-              <a:t>        </a:t>
+              <a:t>GenericPointer</a:t>
+            </a:r>
+            <a:r>
+              <a:rPr lang="en-US" altLang="zh-CN" b="0" dirty="0"/>
+              <a:t>));</a:t>
+            </a:r>
+          </a:p>
+          <a:p>
+            <a:pPr marL="0" indent="0">
+              <a:lnSpc>
+                <a:spcPct val="100000"/>
+              </a:lnSpc>
+              <a:buNone/>
+            </a:pPr>
+            <a:r>
+              <a:rPr lang="en-US" altLang="zh-CN" b="0" dirty="0"/>
+              <a:t>        if(</a:t>
             </a:r>
             <a:r>
               <a:rPr lang="en-US" altLang="zh-CN" b="0" dirty="0" err="1"/>
@@ -7465,127 +7494,15 @@
             </a:r>
             <a:r>
               <a:rPr lang="en-US" altLang="zh-CN" b="0" dirty="0"/>
-              <a:t>=(</a:t>
-            </a:r>
-            <a:r>
-              <a:rPr lang="en-US" altLang="zh-CN" b="0" dirty="0" err="1"/>
-              <a:t>GenericPointer</a:t>
-            </a:r>
-            <a:r>
-              <a:rPr lang="en-US" altLang="zh-CN" b="0" dirty="0"/>
-              <a:t>*)</a:t>
-            </a:r>
-            <a:r>
-              <a:rPr lang="en-US" altLang="zh-CN" b="0" dirty="0" err="1"/>
-              <a:t>realloc</a:t>
-            </a:r>
-            <a:r>
-              <a:rPr lang="en-US" altLang="zh-CN" b="0" dirty="0"/>
-              <a:t>(</a:t>
-            </a:r>
-          </a:p>
-          <a:p>
-            <a:pPr marL="0" indent="0">
-              <a:lnSpc>
-                <a:spcPct val="100000"/>
-              </a:lnSpc>
-              <a:buNone/>
-            </a:pPr>
-            <a:r>
-              <a:rPr lang="en-US" altLang="zh-CN" b="0" dirty="0"/>
-              <a:t>                       </a:t>
-            </a:r>
-            <a:r>
-              <a:rPr lang="en-US" altLang="zh-CN" b="0" dirty="0" err="1"/>
-              <a:t>pStack</a:t>
-            </a:r>
-            <a:r>
-              <a:rPr lang="en-US" altLang="zh-CN" b="0" dirty="0"/>
-              <a:t>-&gt;</a:t>
-            </a:r>
-            <a:r>
-              <a:rPr lang="en-US" altLang="zh-CN" b="0" dirty="0" err="1"/>
-              <a:t>pBase</a:t>
-            </a:r>
-            <a:r>
-              <a:rPr lang="en-US" altLang="zh-CN" b="0" dirty="0"/>
-              <a:t>,</a:t>
-            </a:r>
-          </a:p>
-          <a:p>
-            <a:pPr marL="0" indent="0">
-              <a:lnSpc>
-                <a:spcPct val="100000"/>
-              </a:lnSpc>
-              <a:buNone/>
-            </a:pPr>
-            <a:r>
-              <a:rPr lang="en-US" altLang="zh-CN" b="0" dirty="0"/>
-              <a:t>                       (</a:t>
-            </a:r>
-            <a:r>
-              <a:rPr lang="en-US" altLang="zh-CN" b="0" dirty="0" err="1"/>
-              <a:t>pStack</a:t>
-            </a:r>
-            <a:r>
-              <a:rPr lang="en-US" altLang="zh-CN" b="0" dirty="0"/>
-              <a:t>-&gt;</a:t>
-            </a:r>
-            <a:r>
-              <a:rPr lang="en-US" altLang="zh-CN" b="0" dirty="0" err="1"/>
-              <a:t>size+STACK_INCREMENT</a:t>
-            </a:r>
-            <a:r>
-              <a:rPr lang="en-US" altLang="zh-CN" b="0" dirty="0"/>
-              <a:t>)*</a:t>
-            </a:r>
-          </a:p>
-          <a:p>
-            <a:pPr marL="0" indent="0">
-              <a:lnSpc>
-                <a:spcPct val="100000"/>
-              </a:lnSpc>
-              <a:buNone/>
-            </a:pPr>
-            <a:r>
-              <a:rPr lang="en-US" altLang="zh-CN" b="0" dirty="0"/>
-              <a:t>                                               </a:t>
-            </a:r>
-            <a:r>
-              <a:rPr lang="en-US" altLang="zh-CN" b="0" dirty="0" err="1"/>
-              <a:t>sizeof</a:t>
-            </a:r>
-            <a:r>
-              <a:rPr lang="en-US" altLang="zh-CN" b="0" dirty="0"/>
-              <a:t>(</a:t>
-            </a:r>
-            <a:r>
-              <a:rPr lang="en-US" altLang="zh-CN" b="0" dirty="0" err="1"/>
-              <a:t>GenericPointer</a:t>
-            </a:r>
-            <a:r>
-              <a:rPr lang="en-US" altLang="zh-CN" b="0" dirty="0"/>
-              <a:t>));</a:t>
-            </a:r>
-          </a:p>
-          <a:p>
-            <a:pPr marL="0" indent="0">
-              <a:lnSpc>
-                <a:spcPct val="100000"/>
-              </a:lnSpc>
-              <a:buNone/>
-            </a:pPr>
-            <a:r>
-              <a:rPr lang="en-US" altLang="zh-CN" b="0" dirty="0"/>
-              <a:t>        if(</a:t>
-            </a:r>
-            <a:r>
-              <a:rPr lang="en-US" altLang="zh-CN" b="0" dirty="0" err="1"/>
-              <a:t>pBase</a:t>
-            </a:r>
-            <a:r>
-              <a:rPr lang="en-US" altLang="zh-CN" b="0" dirty="0"/>
-              <a:t>==NULL){</a:t>
+              <a:t>==</a:t>
+            </a:r>
+            <a:r>
+              <a:rPr lang="en-US" altLang="zh-CN" b="0" dirty="0" err="1"/>
+              <a:t>nullptr</a:t>
+            </a:r>
+            <a:r>
+              <a:rPr lang="en-US" altLang="zh-CN" b="0" dirty="0"/>
+              <a:t>){</a:t>
             </a:r>
           </a:p>
           <a:p>
@@ -8049,7 +7966,7 @@
             </a:r>
             <a:r>
               <a:rPr lang="en-US" altLang="zh-CN" b="0" dirty="0"/>
-              <a:t>)==YES) {</a:t>
+              <a:t>)==true) {</a:t>
             </a:r>
           </a:p>
           <a:p>
@@ -9059,15 +8976,7 @@
             </a:r>
             <a:r>
               <a:rPr lang="en-US" altLang="zh-CN" b="0" dirty="0"/>
-              <a:t>  </a:t>
-            </a:r>
-            <a:r>
-              <a:rPr lang="en-US" altLang="zh-CN" b="0" dirty="0" err="1"/>
-              <a:t>elemArray</a:t>
-            </a:r>
-            <a:r>
-              <a:rPr lang="en-US" altLang="zh-CN" b="0" dirty="0"/>
-              <a:t>[STACK_SIZE];</a:t>
+              <a:t>  a[STACK_SIZE];</a:t>
             </a:r>
           </a:p>
           <a:p>
@@ -10173,12 +10082,8 @@
               <a:buNone/>
             </a:pPr>
             <a:r>
-              <a:rPr lang="en-US" altLang="zh-CN" b="0" dirty="0" err="1"/>
-              <a:t>YesNo</a:t>
-            </a:r>
-            <a:r>
-              <a:rPr lang="en-US" altLang="zh-CN" b="0" dirty="0"/>
-              <a:t> </a:t>
+              <a:rPr lang="en-US" altLang="zh-CN" b="0" dirty="0"/>
+              <a:t>bool </a:t>
             </a:r>
             <a:r>
               <a:rPr lang="en-US" altLang="zh-CN" b="0" dirty="0" err="1"/>
@@ -10242,7 +10147,7 @@
             </a:pPr>
             <a:r>
               <a:rPr lang="en-US" altLang="zh-CN" b="0" dirty="0"/>
-              <a:t>        return YES;</a:t>
+              <a:t>        return true;</a:t>
             </a:r>
           </a:p>
           <a:p>
@@ -10278,7 +10183,7 @@
             </a:pPr>
             <a:r>
               <a:rPr lang="en-US" altLang="zh-CN" b="0" dirty="0"/>
-              <a:t>        return NO;</a:t>
+              <a:t>        return false;</a:t>
             </a:r>
           </a:p>
           <a:p>
@@ -10393,12 +10298,8 @@
               <a:buNone/>
             </a:pPr>
             <a:r>
-              <a:rPr lang="en-US" altLang="zh-CN" b="0" dirty="0" err="1"/>
-              <a:t>YesNo</a:t>
-            </a:r>
-            <a:r>
-              <a:rPr lang="en-US" altLang="zh-CN" b="0" dirty="0"/>
-              <a:t> </a:t>
+              <a:rPr lang="en-US" altLang="zh-CN" b="0" dirty="0"/>
+              <a:t>bool </a:t>
             </a:r>
             <a:r>
               <a:rPr lang="en-US" altLang="zh-CN" b="0" dirty="0" err="1"/>
@@ -10462,7 +10363,7 @@
             </a:pPr>
             <a:r>
               <a:rPr lang="en-US" altLang="zh-CN" b="0" dirty="0"/>
-              <a:t>        return YES;</a:t>
+              <a:t>        return true;</a:t>
             </a:r>
           </a:p>
           <a:p>
@@ -10498,7 +10399,7 @@
             </a:pPr>
             <a:r>
               <a:rPr lang="en-US" altLang="zh-CN" b="0" dirty="0"/>
-              <a:t>        return NO;</a:t>
+              <a:t>        return false;</a:t>
             </a:r>
           </a:p>
           <a:p>
@@ -10694,7 +10595,7 @@
             </a:r>
             <a:r>
               <a:rPr lang="en-US" altLang="zh-CN" b="0" dirty="0"/>
-              <a:t>)==YES) {</a:t>
+              <a:t>)==true) {</a:t>
             </a:r>
           </a:p>
           <a:p>
@@ -10986,7 +10887,7 @@
             </a:r>
             <a:r>
               <a:rPr lang="en-US" altLang="zh-CN" b="0" dirty="0"/>
-              <a:t>)==YES) {</a:t>
+              <a:t>)==true) {</a:t>
             </a:r>
           </a:p>
           <a:p>
@@ -11679,7 +11580,15 @@
             </a:r>
             <a:r>
               <a:rPr lang="en-US" altLang="zh-CN" b="0" dirty="0"/>
-              <a:t>==NULL) {</a:t>
+              <a:t>==</a:t>
+            </a:r>
+            <a:r>
+              <a:rPr lang="en-US" altLang="zh-CN" b="0" dirty="0" err="1"/>
+              <a:t>nullptr</a:t>
+            </a:r>
+            <a:r>
+              <a:rPr lang="en-US" altLang="zh-CN" b="0" dirty="0"/>
+              <a:t>) {</a:t>
             </a:r>
           </a:p>
           <a:p>
@@ -11939,7 +11848,15 @@
             </a:r>
             <a:r>
               <a:rPr lang="en-US" altLang="zh-CN" b="0" dirty="0"/>
-              <a:t>=NULL;</a:t>
+              <a:t>=</a:t>
+            </a:r>
+            <a:r>
+              <a:rPr lang="en-US" altLang="zh-CN" b="0" dirty="0" err="1"/>
+              <a:t>nullptr</a:t>
+            </a:r>
+            <a:r>
+              <a:rPr lang="en-US" altLang="zh-CN" b="0" dirty="0"/>
+              <a:t>;</a:t>
             </a:r>
           </a:p>
           <a:p>
@@ -12130,12 +12047,8 @@
               <a:buNone/>
             </a:pPr>
             <a:r>
-              <a:rPr lang="en-US" altLang="zh-CN" b="0" dirty="0" err="1"/>
-              <a:t>YesNo</a:t>
-            </a:r>
-            <a:r>
-              <a:rPr lang="en-US" altLang="zh-CN" b="0" dirty="0"/>
-              <a:t> </a:t>
+              <a:rPr lang="en-US" altLang="zh-CN" b="0" dirty="0"/>
+              <a:t>bool </a:t>
             </a:r>
             <a:r>
               <a:rPr lang="en-US" altLang="zh-CN" b="0" dirty="0" err="1"/>
@@ -12170,12 +12083,8 @@
               <a:buNone/>
             </a:pPr>
             <a:r>
-              <a:rPr lang="en-US" altLang="zh-CN" b="0" dirty="0" err="1"/>
-              <a:t>YesNo</a:t>
-            </a:r>
-            <a:r>
-              <a:rPr lang="en-US" altLang="zh-CN" b="0" dirty="0"/>
-              <a:t> </a:t>
+              <a:rPr lang="en-US" altLang="zh-CN" b="0" dirty="0"/>
+              <a:t>bool </a:t>
             </a:r>
             <a:r>
               <a:rPr lang="en-US" altLang="zh-CN" b="0" dirty="0" err="1"/>
@@ -12773,7 +12682,15 @@
             </a:r>
             <a:r>
               <a:rPr lang="en-US" altLang="zh-CN" b="0" dirty="0"/>
-              <a:t>=NULL;</a:t>
+              <a:t>=</a:t>
+            </a:r>
+            <a:r>
+              <a:rPr lang="en-US" altLang="zh-CN" b="0" dirty="0" err="1"/>
+              <a:t>nullptr</a:t>
+            </a:r>
+            <a:r>
+              <a:rPr lang="en-US" altLang="zh-CN" b="0" dirty="0"/>
+              <a:t>;</a:t>
             </a:r>
           </a:p>
           <a:p>
@@ -12801,7 +12718,15 @@
             </a:r>
             <a:r>
               <a:rPr lang="en-US" altLang="zh-CN" b="0" dirty="0"/>
-              <a:t>=NULL;</a:t>
+              <a:t>=</a:t>
+            </a:r>
+            <a:r>
+              <a:rPr lang="en-US" altLang="zh-CN" b="0" dirty="0" err="1"/>
+              <a:t>nullptr</a:t>
+            </a:r>
+            <a:r>
+              <a:rPr lang="en-US" altLang="zh-CN" b="0" dirty="0"/>
+              <a:t>;</a:t>
             </a:r>
           </a:p>
           <a:p>
@@ -12936,12 +12861,8 @@
               <a:buNone/>
             </a:pPr>
             <a:r>
-              <a:rPr lang="en-US" altLang="zh-CN" b="0" dirty="0" err="1"/>
-              <a:t>YesNo</a:t>
-            </a:r>
-            <a:r>
-              <a:rPr lang="en-US" altLang="zh-CN" b="0" dirty="0"/>
-              <a:t> </a:t>
+              <a:rPr lang="en-US" altLang="zh-CN" b="0" dirty="0"/>
+              <a:t>bool </a:t>
             </a:r>
             <a:r>
               <a:rPr lang="en-US" altLang="zh-CN" b="0" dirty="0" err="1"/>
@@ -12989,7 +12910,7 @@
             </a:pPr>
             <a:r>
               <a:rPr lang="en-US" altLang="zh-CN" b="0" dirty="0"/>
-              <a:t>        return YES;</a:t>
+              <a:t>        return true;</a:t>
             </a:r>
           </a:p>
           <a:p>
@@ -13025,7 +12946,7 @@
             </a:pPr>
             <a:r>
               <a:rPr lang="en-US" altLang="zh-CN" b="0" dirty="0"/>
-              <a:t>        return NO;</a:t>
+              <a:t>        return false;</a:t>
             </a:r>
           </a:p>
           <a:p>
@@ -13417,7 +13338,15 @@
             </a:r>
             <a:r>
               <a:rPr lang="en-US" altLang="zh-CN" b="0" dirty="0"/>
-              <a:t>==NULL){</a:t>
+              <a:t>==</a:t>
+            </a:r>
+            <a:r>
+              <a:rPr lang="en-US" altLang="zh-CN" b="0" dirty="0" err="1"/>
+              <a:t>nullptr</a:t>
+            </a:r>
+            <a:r>
+              <a:rPr lang="en-US" altLang="zh-CN" b="0" dirty="0"/>
+              <a:t>){</a:t>
             </a:r>
           </a:p>
           <a:p>
@@ -13505,7 +13434,15 @@
             </a:r>
             <a:r>
               <a:rPr lang="en-US" altLang="zh-CN" b="0" dirty="0"/>
-              <a:t>=NULL;</a:t>
+              <a:t>=</a:t>
+            </a:r>
+            <a:r>
+              <a:rPr lang="en-US" altLang="zh-CN" b="0" dirty="0" err="1"/>
+              <a:t>nullptr</a:t>
+            </a:r>
+            <a:r>
+              <a:rPr lang="en-US" altLang="zh-CN" b="0" dirty="0"/>
+              <a:t>;</a:t>
             </a:r>
           </a:p>
           <a:p>
@@ -13533,7 +13470,7 @@
             </a:r>
             <a:r>
               <a:rPr lang="en-US" altLang="zh-CN" b="0" dirty="0"/>
-              <a:t>)==YES) {</a:t>
+              <a:t>)==true) {</a:t>
             </a:r>
           </a:p>
         </p:txBody>
@@ -14055,7 +13992,7 @@
             </a:r>
             <a:r>
               <a:rPr lang="en-US" altLang="zh-CN" b="0" dirty="0"/>
-              <a:t>)==YES) {</a:t>
+              <a:t>)==true) {</a:t>
             </a:r>
           </a:p>
           <a:p>
@@ -14163,7 +14100,15 @@
             </a:r>
             <a:r>
               <a:rPr lang="en-US" altLang="zh-CN" b="0" dirty="0"/>
-              <a:t>=NULL;</a:t>
+              <a:t>=</a:t>
+            </a:r>
+            <a:r>
+              <a:rPr lang="en-US" altLang="zh-CN" b="0" dirty="0" err="1"/>
+              <a:t>nullptr</a:t>
+            </a:r>
+            <a:r>
+              <a:rPr lang="en-US" altLang="zh-CN" b="0" dirty="0"/>
+              <a:t>;</a:t>
             </a:r>
           </a:p>
           <a:p>
@@ -14191,7 +14136,15 @@
             </a:r>
             <a:r>
               <a:rPr lang="en-US" altLang="zh-CN" b="0" dirty="0"/>
-              <a:t>=NULL;</a:t>
+              <a:t>=</a:t>
+            </a:r>
+            <a:r>
+              <a:rPr lang="en-US" altLang="zh-CN" b="0" dirty="0" err="1"/>
+              <a:t>nullptr</a:t>
+            </a:r>
+            <a:r>
+              <a:rPr lang="en-US" altLang="zh-CN" b="0" dirty="0"/>
+              <a:t>;</a:t>
             </a:r>
           </a:p>
           <a:p>
@@ -14315,15 +14268,7 @@
             </a:pPr>
             <a:r>
               <a:rPr lang="en-US" altLang="zh-CN" b="0" dirty="0"/>
-              <a:t>    </a:t>
-            </a:r>
-            <a:r>
-              <a:rPr lang="en-US" altLang="zh-CN" b="0" dirty="0" err="1"/>
-              <a:t>GenericPointer</a:t>
-            </a:r>
-            <a:r>
-              <a:rPr lang="en-US" altLang="zh-CN" b="0" dirty="0"/>
-              <a:t>*  </a:t>
+              <a:t>    void*  </a:t>
             </a:r>
             <a:r>
               <a:rPr lang="en-US" altLang="zh-CN" b="0" dirty="0" err="1"/>
@@ -14343,15 +14288,7 @@
             </a:pPr>
             <a:r>
               <a:rPr lang="en-US" altLang="zh-CN" b="0" dirty="0"/>
-              <a:t>    </a:t>
-            </a:r>
-            <a:r>
-              <a:rPr lang="en-US" altLang="zh-CN" b="0" dirty="0" err="1"/>
-              <a:t>GenericPointer</a:t>
-            </a:r>
-            <a:r>
-              <a:rPr lang="en-US" altLang="zh-CN" b="0" dirty="0"/>
-              <a:t>*  </a:t>
+              <a:t>    void*  </a:t>
             </a:r>
             <a:r>
               <a:rPr lang="en-US" altLang="zh-CN" b="0" dirty="0" err="1"/>
@@ -14371,7 +14308,35 @@
             </a:pPr>
             <a:r>
               <a:rPr lang="en-US" altLang="zh-CN" b="0" dirty="0"/>
-              <a:t>    int size;</a:t>
+              <a:t>    int </a:t>
+            </a:r>
+            <a:r>
+              <a:rPr lang="en-US" altLang="zh-CN" b="0" dirty="0" err="1"/>
+              <a:t>elemSize</a:t>
+            </a:r>
+            <a:r>
+              <a:rPr lang="en-US" altLang="zh-CN" b="0" dirty="0"/>
+              <a:t>;</a:t>
+            </a:r>
+          </a:p>
+          <a:p>
+            <a:pPr marL="0" indent="0">
+              <a:lnSpc>
+                <a:spcPct val="120000"/>
+              </a:lnSpc>
+              <a:buNone/>
+            </a:pPr>
+            <a:r>
+              <a:rPr lang="en-US" altLang="zh-CN" b="0" dirty="0"/>
+              <a:t>    int </a:t>
+            </a:r>
+            <a:r>
+              <a:rPr lang="en-US" altLang="zh-CN" b="0" dirty="0" err="1"/>
+              <a:t>stackSize</a:t>
+            </a:r>
+            <a:r>
+              <a:rPr lang="en-US" altLang="zh-CN" b="0" dirty="0"/>
+              <a:t>;</a:t>
             </a:r>
           </a:p>
           <a:p>
@@ -14838,7 +14803,15 @@
             </a:r>
             <a:r>
               <a:rPr lang="en-US" altLang="zh-CN" b="0" dirty="0"/>
-              <a:t>==NULL){</a:t>
+              <a:t>==</a:t>
+            </a:r>
+            <a:r>
+              <a:rPr lang="en-US" altLang="zh-CN" b="0" dirty="0" err="1"/>
+              <a:t>nullptr</a:t>
+            </a:r>
+            <a:r>
+              <a:rPr lang="en-US" altLang="zh-CN" b="0" dirty="0"/>
+              <a:t>){</a:t>
             </a:r>
           </a:p>
           <a:p>
@@ -15203,7 +15176,15 @@
             </a:r>
             <a:r>
               <a:rPr lang="en-US" altLang="zh-CN" b="0" dirty="0"/>
-              <a:t>=NULL;</a:t>
+              <a:t>=</a:t>
+            </a:r>
+            <a:r>
+              <a:rPr lang="en-US" altLang="zh-CN" b="0" dirty="0" err="1"/>
+              <a:t>nullptr</a:t>
+            </a:r>
+            <a:r>
+              <a:rPr lang="en-US" altLang="zh-CN" b="0" dirty="0"/>
+              <a:t>;</a:t>
             </a:r>
           </a:p>
           <a:p>
@@ -15447,7 +15428,15 @@
             </a:r>
             <a:r>
               <a:rPr lang="en-US" altLang="zh-CN" b="0" dirty="0"/>
-              <a:t>!=NULL) {</a:t>
+              <a:t>!=</a:t>
+            </a:r>
+            <a:r>
+              <a:rPr lang="en-US" altLang="zh-CN" b="0" dirty="0" err="1"/>
+              <a:t>nullptr</a:t>
+            </a:r>
+            <a:r>
+              <a:rPr lang="en-US" altLang="zh-CN" b="0" dirty="0"/>
+              <a:t>) {</a:t>
             </a:r>
           </a:p>
           <a:p>
@@ -15580,6 +15569,508 @@
     <p:extLst>
       <p:ext uri="{BB962C8B-B14F-4D97-AF65-F5344CB8AC3E}">
         <p14:creationId xmlns:p14="http://schemas.microsoft.com/office/powerpoint/2010/main" val="435858517"/>
+      </p:ext>
+    </p:extLst>
+  </p:cSld>
+  <p:clrMapOvr>
+    <a:masterClrMapping/>
+  </p:clrMapOvr>
+</p:sld>
+</file>
+
+<file path=ppt/slides/slide54.xml><?xml version="1.0" encoding="utf-8"?>
+<p:sld xmlns:a="http://schemas.openxmlformats.org/drawingml/2006/main" xmlns:r="http://schemas.openxmlformats.org/officeDocument/2006/relationships" xmlns:p="http://schemas.openxmlformats.org/presentationml/2006/main">
+  <p:cSld>
+    <p:spTree>
+      <p:nvGrpSpPr>
+        <p:cNvPr id="1" name=""/>
+        <p:cNvGrpSpPr/>
+        <p:nvPr/>
+      </p:nvGrpSpPr>
+      <p:grpSpPr>
+        <a:xfrm>
+          <a:off x="0" y="0"/>
+          <a:ext cx="0" cy="0"/>
+          <a:chOff x="0" y="0"/>
+          <a:chExt cx="0" cy="0"/>
+        </a:xfrm>
+      </p:grpSpPr>
+      <p:sp>
+        <p:nvSpPr>
+          <p:cNvPr id="2" name="标题 1">
+            <a:extLst>
+              <a:ext uri="{FF2B5EF4-FFF2-40B4-BE49-F238E27FC236}">
+                <a16:creationId xmlns:a16="http://schemas.microsoft.com/office/drawing/2014/main" id="{C4BE8688-81A9-637D-1296-2F94EC3EAE0B}"/>
+              </a:ext>
+            </a:extLst>
+          </p:cNvPr>
+          <p:cNvSpPr>
+            <a:spLocks noGrp="1"/>
+          </p:cNvSpPr>
+          <p:nvPr>
+            <p:ph type="title"/>
+          </p:nvPr>
+        </p:nvSpPr>
+        <p:spPr/>
+        <p:txBody>
+          <a:bodyPr/>
+          <a:lstStyle/>
+          <a:p>
+            <a:endParaRPr lang="zh-CN" altLang="en-US"/>
+          </a:p>
+        </p:txBody>
+      </p:sp>
+      <p:pic>
+        <p:nvPicPr>
+          <p:cNvPr id="5" name="内容占位符 4">
+            <a:extLst>
+              <a:ext uri="{FF2B5EF4-FFF2-40B4-BE49-F238E27FC236}">
+                <a16:creationId xmlns:a16="http://schemas.microsoft.com/office/drawing/2014/main" id="{272690A0-0255-750C-5454-4C4993D827EF}"/>
+              </a:ext>
+            </a:extLst>
+          </p:cNvPr>
+          <p:cNvPicPr>
+            <a:picLocks noGrp="1" noChangeAspect="1"/>
+          </p:cNvPicPr>
+          <p:nvPr>
+            <p:ph idx="1"/>
+          </p:nvPr>
+        </p:nvPicPr>
+        <p:blipFill>
+          <a:blip r:embed="rId2"/>
+          <a:stretch>
+            <a:fillRect/>
+          </a:stretch>
+        </p:blipFill>
+        <p:spPr>
+          <a:xfrm>
+            <a:off x="76200" y="533400"/>
+            <a:ext cx="12372670" cy="5791200"/>
+          </a:xfrm>
+        </p:spPr>
+      </p:pic>
+    </p:spTree>
+    <p:extLst>
+      <p:ext uri="{BB962C8B-B14F-4D97-AF65-F5344CB8AC3E}">
+        <p14:creationId xmlns:p14="http://schemas.microsoft.com/office/powerpoint/2010/main" val="1812375066"/>
+      </p:ext>
+    </p:extLst>
+  </p:cSld>
+  <p:clrMapOvr>
+    <a:masterClrMapping/>
+  </p:clrMapOvr>
+</p:sld>
+</file>
+
+<file path=ppt/slides/slide55.xml><?xml version="1.0" encoding="utf-8"?>
+<p:sld xmlns:a="http://schemas.openxmlformats.org/drawingml/2006/main" xmlns:r="http://schemas.openxmlformats.org/officeDocument/2006/relationships" xmlns:p="http://schemas.openxmlformats.org/presentationml/2006/main">
+  <p:cSld>
+    <p:spTree>
+      <p:nvGrpSpPr>
+        <p:cNvPr id="1" name=""/>
+        <p:cNvGrpSpPr/>
+        <p:nvPr/>
+      </p:nvGrpSpPr>
+      <p:grpSpPr>
+        <a:xfrm>
+          <a:off x="0" y="0"/>
+          <a:ext cx="0" cy="0"/>
+          <a:chOff x="0" y="0"/>
+          <a:chExt cx="0" cy="0"/>
+        </a:xfrm>
+      </p:grpSpPr>
+      <p:sp>
+        <p:nvSpPr>
+          <p:cNvPr id="2" name="标题 1">
+            <a:extLst>
+              <a:ext uri="{FF2B5EF4-FFF2-40B4-BE49-F238E27FC236}">
+                <a16:creationId xmlns:a16="http://schemas.microsoft.com/office/drawing/2014/main" id="{AEA7A720-E66C-F5E4-F6EB-A7F69CB67CD1}"/>
+              </a:ext>
+            </a:extLst>
+          </p:cNvPr>
+          <p:cNvSpPr>
+            <a:spLocks noGrp="1"/>
+          </p:cNvSpPr>
+          <p:nvPr>
+            <p:ph type="title"/>
+          </p:nvPr>
+        </p:nvSpPr>
+        <p:spPr/>
+        <p:txBody>
+          <a:bodyPr/>
+          <a:lstStyle/>
+          <a:p>
+            <a:endParaRPr lang="zh-CN" altLang="en-US"/>
+          </a:p>
+        </p:txBody>
+      </p:sp>
+      <p:pic>
+        <p:nvPicPr>
+          <p:cNvPr id="5" name="内容占位符 4">
+            <a:extLst>
+              <a:ext uri="{FF2B5EF4-FFF2-40B4-BE49-F238E27FC236}">
+                <a16:creationId xmlns:a16="http://schemas.microsoft.com/office/drawing/2014/main" id="{A9AD4C75-DE7A-E074-B592-6A992C36305C}"/>
+              </a:ext>
+            </a:extLst>
+          </p:cNvPr>
+          <p:cNvPicPr>
+            <a:picLocks noGrp="1" noChangeAspect="1"/>
+          </p:cNvPicPr>
+          <p:nvPr>
+            <p:ph idx="1"/>
+          </p:nvPr>
+        </p:nvPicPr>
+        <p:blipFill>
+          <a:blip r:embed="rId2"/>
+          <a:stretch>
+            <a:fillRect/>
+          </a:stretch>
+        </p:blipFill>
+        <p:spPr>
+          <a:xfrm>
+            <a:off x="-1" y="510988"/>
+            <a:ext cx="12345851" cy="5966012"/>
+          </a:xfrm>
+        </p:spPr>
+      </p:pic>
+    </p:spTree>
+    <p:extLst>
+      <p:ext uri="{BB962C8B-B14F-4D97-AF65-F5344CB8AC3E}">
+        <p14:creationId xmlns:p14="http://schemas.microsoft.com/office/powerpoint/2010/main" val="1456890268"/>
+      </p:ext>
+    </p:extLst>
+  </p:cSld>
+  <p:clrMapOvr>
+    <a:masterClrMapping/>
+  </p:clrMapOvr>
+</p:sld>
+</file>
+
+<file path=ppt/slides/slide56.xml><?xml version="1.0" encoding="utf-8"?>
+<p:sld xmlns:a="http://schemas.openxmlformats.org/drawingml/2006/main" xmlns:r="http://schemas.openxmlformats.org/officeDocument/2006/relationships" xmlns:p="http://schemas.openxmlformats.org/presentationml/2006/main">
+  <p:cSld>
+    <p:spTree>
+      <p:nvGrpSpPr>
+        <p:cNvPr id="1" name=""/>
+        <p:cNvGrpSpPr/>
+        <p:nvPr/>
+      </p:nvGrpSpPr>
+      <p:grpSpPr>
+        <a:xfrm>
+          <a:off x="0" y="0"/>
+          <a:ext cx="0" cy="0"/>
+          <a:chOff x="0" y="0"/>
+          <a:chExt cx="0" cy="0"/>
+        </a:xfrm>
+      </p:grpSpPr>
+      <p:sp>
+        <p:nvSpPr>
+          <p:cNvPr id="2" name="标题 1">
+            <a:extLst>
+              <a:ext uri="{FF2B5EF4-FFF2-40B4-BE49-F238E27FC236}">
+                <a16:creationId xmlns:a16="http://schemas.microsoft.com/office/drawing/2014/main" id="{08A1B2C7-2F29-B536-84A6-758E59050289}"/>
+              </a:ext>
+            </a:extLst>
+          </p:cNvPr>
+          <p:cNvSpPr>
+            <a:spLocks noGrp="1"/>
+          </p:cNvSpPr>
+          <p:nvPr>
+            <p:ph type="title"/>
+          </p:nvPr>
+        </p:nvSpPr>
+        <p:spPr/>
+        <p:txBody>
+          <a:bodyPr/>
+          <a:lstStyle/>
+          <a:p>
+            <a:endParaRPr lang="zh-CN" altLang="en-US"/>
+          </a:p>
+        </p:txBody>
+      </p:sp>
+      <p:pic>
+        <p:nvPicPr>
+          <p:cNvPr id="5" name="内容占位符 4">
+            <a:extLst>
+              <a:ext uri="{FF2B5EF4-FFF2-40B4-BE49-F238E27FC236}">
+                <a16:creationId xmlns:a16="http://schemas.microsoft.com/office/drawing/2014/main" id="{CC8952F5-FE01-F5A4-69C0-92AEC272BFD5}"/>
+              </a:ext>
+            </a:extLst>
+          </p:cNvPr>
+          <p:cNvPicPr>
+            <a:picLocks noGrp="1" noChangeAspect="1"/>
+          </p:cNvPicPr>
+          <p:nvPr>
+            <p:ph idx="1"/>
+          </p:nvPr>
+        </p:nvPicPr>
+        <p:blipFill rotWithShape="1">
+          <a:blip r:embed="rId2"/>
+          <a:srcRect r="18426"/>
+          <a:stretch/>
+        </p:blipFill>
+        <p:spPr>
+          <a:xfrm>
+            <a:off x="-1" y="475129"/>
+            <a:ext cx="12192001" cy="5697071"/>
+          </a:xfrm>
+        </p:spPr>
+      </p:pic>
+    </p:spTree>
+    <p:extLst>
+      <p:ext uri="{BB962C8B-B14F-4D97-AF65-F5344CB8AC3E}">
+        <p14:creationId xmlns:p14="http://schemas.microsoft.com/office/powerpoint/2010/main" val="728870914"/>
+      </p:ext>
+    </p:extLst>
+  </p:cSld>
+  <p:clrMapOvr>
+    <a:masterClrMapping/>
+  </p:clrMapOvr>
+</p:sld>
+</file>
+
+<file path=ppt/slides/slide57.xml><?xml version="1.0" encoding="utf-8"?>
+<p:sld xmlns:a="http://schemas.openxmlformats.org/drawingml/2006/main" xmlns:r="http://schemas.openxmlformats.org/officeDocument/2006/relationships" xmlns:p="http://schemas.openxmlformats.org/presentationml/2006/main">
+  <p:cSld>
+    <p:spTree>
+      <p:nvGrpSpPr>
+        <p:cNvPr id="1" name=""/>
+        <p:cNvGrpSpPr/>
+        <p:nvPr/>
+      </p:nvGrpSpPr>
+      <p:grpSpPr>
+        <a:xfrm>
+          <a:off x="0" y="0"/>
+          <a:ext cx="0" cy="0"/>
+          <a:chOff x="0" y="0"/>
+          <a:chExt cx="0" cy="0"/>
+        </a:xfrm>
+      </p:grpSpPr>
+      <p:sp>
+        <p:nvSpPr>
+          <p:cNvPr id="2" name="标题 1">
+            <a:extLst>
+              <a:ext uri="{FF2B5EF4-FFF2-40B4-BE49-F238E27FC236}">
+                <a16:creationId xmlns:a16="http://schemas.microsoft.com/office/drawing/2014/main" id="{809C33DE-9002-E103-601A-90982375AB2A}"/>
+              </a:ext>
+            </a:extLst>
+          </p:cNvPr>
+          <p:cNvSpPr>
+            <a:spLocks noGrp="1"/>
+          </p:cNvSpPr>
+          <p:nvPr>
+            <p:ph type="title"/>
+          </p:nvPr>
+        </p:nvSpPr>
+        <p:spPr/>
+        <p:txBody>
+          <a:bodyPr/>
+          <a:lstStyle/>
+          <a:p>
+            <a:endParaRPr lang="zh-CN" altLang="en-US"/>
+          </a:p>
+        </p:txBody>
+      </p:sp>
+      <p:pic>
+        <p:nvPicPr>
+          <p:cNvPr id="5" name="内容占位符 4">
+            <a:extLst>
+              <a:ext uri="{FF2B5EF4-FFF2-40B4-BE49-F238E27FC236}">
+                <a16:creationId xmlns:a16="http://schemas.microsoft.com/office/drawing/2014/main" id="{789137DF-7021-2464-AD92-AEDA7F794634}"/>
+              </a:ext>
+            </a:extLst>
+          </p:cNvPr>
+          <p:cNvPicPr>
+            <a:picLocks noGrp="1" noChangeAspect="1"/>
+          </p:cNvPicPr>
+          <p:nvPr>
+            <p:ph idx="1"/>
+          </p:nvPr>
+        </p:nvPicPr>
+        <p:blipFill>
+          <a:blip r:embed="rId2"/>
+          <a:stretch>
+            <a:fillRect/>
+          </a:stretch>
+        </p:blipFill>
+        <p:spPr>
+          <a:xfrm>
+            <a:off x="76200" y="457200"/>
+            <a:ext cx="12538070" cy="5181600"/>
+          </a:xfrm>
+        </p:spPr>
+      </p:pic>
+    </p:spTree>
+    <p:extLst>
+      <p:ext uri="{BB962C8B-B14F-4D97-AF65-F5344CB8AC3E}">
+        <p14:creationId xmlns:p14="http://schemas.microsoft.com/office/powerpoint/2010/main" val="1593820736"/>
+      </p:ext>
+    </p:extLst>
+  </p:cSld>
+  <p:clrMapOvr>
+    <a:masterClrMapping/>
+  </p:clrMapOvr>
+</p:sld>
+</file>
+
+<file path=ppt/slides/slide58.xml><?xml version="1.0" encoding="utf-8"?>
+<p:sld xmlns:a="http://schemas.openxmlformats.org/drawingml/2006/main" xmlns:r="http://schemas.openxmlformats.org/officeDocument/2006/relationships" xmlns:p="http://schemas.openxmlformats.org/presentationml/2006/main">
+  <p:cSld>
+    <p:spTree>
+      <p:nvGrpSpPr>
+        <p:cNvPr id="1" name=""/>
+        <p:cNvGrpSpPr/>
+        <p:nvPr/>
+      </p:nvGrpSpPr>
+      <p:grpSpPr>
+        <a:xfrm>
+          <a:off x="0" y="0"/>
+          <a:ext cx="0" cy="0"/>
+          <a:chOff x="0" y="0"/>
+          <a:chExt cx="0" cy="0"/>
+        </a:xfrm>
+      </p:grpSpPr>
+      <p:sp>
+        <p:nvSpPr>
+          <p:cNvPr id="2" name="标题 1">
+            <a:extLst>
+              <a:ext uri="{FF2B5EF4-FFF2-40B4-BE49-F238E27FC236}">
+                <a16:creationId xmlns:a16="http://schemas.microsoft.com/office/drawing/2014/main" id="{13E820D0-09B5-A038-8251-B617F67223C0}"/>
+              </a:ext>
+            </a:extLst>
+          </p:cNvPr>
+          <p:cNvSpPr>
+            <a:spLocks noGrp="1"/>
+          </p:cNvSpPr>
+          <p:nvPr>
+            <p:ph type="title"/>
+          </p:nvPr>
+        </p:nvSpPr>
+        <p:spPr/>
+        <p:txBody>
+          <a:bodyPr/>
+          <a:lstStyle/>
+          <a:p>
+            <a:endParaRPr lang="zh-CN" altLang="en-US"/>
+          </a:p>
+        </p:txBody>
+      </p:sp>
+      <p:pic>
+        <p:nvPicPr>
+          <p:cNvPr id="5" name="内容占位符 4">
+            <a:extLst>
+              <a:ext uri="{FF2B5EF4-FFF2-40B4-BE49-F238E27FC236}">
+                <a16:creationId xmlns:a16="http://schemas.microsoft.com/office/drawing/2014/main" id="{A438E3A8-13A7-A365-FC60-0C349A7F7DD2}"/>
+              </a:ext>
+            </a:extLst>
+          </p:cNvPr>
+          <p:cNvPicPr>
+            <a:picLocks noGrp="1" noChangeAspect="1"/>
+          </p:cNvPicPr>
+          <p:nvPr>
+            <p:ph idx="1"/>
+          </p:nvPr>
+        </p:nvPicPr>
+        <p:blipFill>
+          <a:blip r:embed="rId2"/>
+          <a:stretch>
+            <a:fillRect/>
+          </a:stretch>
+        </p:blipFill>
+        <p:spPr>
+          <a:xfrm>
+            <a:off x="-1" y="533400"/>
+            <a:ext cx="12602535" cy="5181600"/>
+          </a:xfrm>
+        </p:spPr>
+      </p:pic>
+    </p:spTree>
+    <p:extLst>
+      <p:ext uri="{BB962C8B-B14F-4D97-AF65-F5344CB8AC3E}">
+        <p14:creationId xmlns:p14="http://schemas.microsoft.com/office/powerpoint/2010/main" val="3252550747"/>
+      </p:ext>
+    </p:extLst>
+  </p:cSld>
+  <p:clrMapOvr>
+    <a:masterClrMapping/>
+  </p:clrMapOvr>
+</p:sld>
+</file>
+
+<file path=ppt/slides/slide59.xml><?xml version="1.0" encoding="utf-8"?>
+<p:sld xmlns:a="http://schemas.openxmlformats.org/drawingml/2006/main" xmlns:r="http://schemas.openxmlformats.org/officeDocument/2006/relationships" xmlns:p="http://schemas.openxmlformats.org/presentationml/2006/main">
+  <p:cSld>
+    <p:spTree>
+      <p:nvGrpSpPr>
+        <p:cNvPr id="1" name=""/>
+        <p:cNvGrpSpPr/>
+        <p:nvPr/>
+      </p:nvGrpSpPr>
+      <p:grpSpPr>
+        <a:xfrm>
+          <a:off x="0" y="0"/>
+          <a:ext cx="0" cy="0"/>
+          <a:chOff x="0" y="0"/>
+          <a:chExt cx="0" cy="0"/>
+        </a:xfrm>
+      </p:grpSpPr>
+      <p:sp>
+        <p:nvSpPr>
+          <p:cNvPr id="2" name="标题 1">
+            <a:extLst>
+              <a:ext uri="{FF2B5EF4-FFF2-40B4-BE49-F238E27FC236}">
+                <a16:creationId xmlns:a16="http://schemas.microsoft.com/office/drawing/2014/main" id="{1FD37C05-7E10-0C1E-D7A8-F0C975D1E82E}"/>
+              </a:ext>
+            </a:extLst>
+          </p:cNvPr>
+          <p:cNvSpPr>
+            <a:spLocks noGrp="1"/>
+          </p:cNvSpPr>
+          <p:nvPr>
+            <p:ph type="title"/>
+          </p:nvPr>
+        </p:nvSpPr>
+        <p:spPr/>
+        <p:txBody>
+          <a:bodyPr/>
+          <a:lstStyle/>
+          <a:p>
+            <a:endParaRPr lang="zh-CN" altLang="en-US"/>
+          </a:p>
+        </p:txBody>
+      </p:sp>
+      <p:pic>
+        <p:nvPicPr>
+          <p:cNvPr id="5" name="内容占位符 4">
+            <a:extLst>
+              <a:ext uri="{FF2B5EF4-FFF2-40B4-BE49-F238E27FC236}">
+                <a16:creationId xmlns:a16="http://schemas.microsoft.com/office/drawing/2014/main" id="{942F7E33-7183-D8B2-E64B-81B8F6F8B43D}"/>
+              </a:ext>
+            </a:extLst>
+          </p:cNvPr>
+          <p:cNvPicPr>
+            <a:picLocks noGrp="1" noChangeAspect="1"/>
+          </p:cNvPicPr>
+          <p:nvPr>
+            <p:ph idx="1"/>
+          </p:nvPr>
+        </p:nvPicPr>
+        <p:blipFill rotWithShape="1">
+          <a:blip r:embed="rId2"/>
+          <a:srcRect r="11841"/>
+          <a:stretch/>
+        </p:blipFill>
+        <p:spPr>
+          <a:xfrm>
+            <a:off x="1" y="497541"/>
+            <a:ext cx="12039600" cy="6055659"/>
+          </a:xfrm>
+        </p:spPr>
+      </p:pic>
+    </p:spTree>
+    <p:extLst>
+      <p:ext uri="{BB962C8B-B14F-4D97-AF65-F5344CB8AC3E}">
+        <p14:creationId xmlns:p14="http://schemas.microsoft.com/office/powerpoint/2010/main" val="2001160495"/>
       </p:ext>
     </p:extLst>
   </p:cSld>
@@ -15684,6 +16175,26 @@
             </a:pPr>
             <a:r>
               <a:rPr lang="en-US" altLang="zh-CN" b="0" dirty="0"/>
+              <a:t>#include “</a:t>
+            </a:r>
+            <a:r>
+              <a:rPr lang="en-US" altLang="zh-CN" b="0" dirty="0" err="1"/>
+              <a:t>LinkedList.h</a:t>
+            </a:r>
+            <a:r>
+              <a:rPr lang="en-US" altLang="zh-CN" b="0" dirty="0"/>
+              <a:t>”</a:t>
+            </a:r>
+          </a:p>
+          <a:p>
+            <a:pPr marL="0" indent="0">
+              <a:lnSpc>
+                <a:spcPct val="120000"/>
+              </a:lnSpc>
+              <a:buNone/>
+            </a:pPr>
+            <a:r>
+              <a:rPr lang="en-US" altLang="zh-CN" b="0" dirty="0"/>
               <a:t>typedef LinkedList </a:t>
             </a:r>
             <a:r>
@@ -15736,6 +16247,588 @@
     <p:extLst>
       <p:ext uri="{BB962C8B-B14F-4D97-AF65-F5344CB8AC3E}">
         <p14:creationId xmlns:p14="http://schemas.microsoft.com/office/powerpoint/2010/main" val="3130071883"/>
+      </p:ext>
+    </p:extLst>
+  </p:cSld>
+  <p:clrMapOvr>
+    <a:masterClrMapping/>
+  </p:clrMapOvr>
+</p:sld>
+</file>
+
+<file path=ppt/slides/slide60.xml><?xml version="1.0" encoding="utf-8"?>
+<p:sld xmlns:a="http://schemas.openxmlformats.org/drawingml/2006/main" xmlns:r="http://schemas.openxmlformats.org/officeDocument/2006/relationships" xmlns:p="http://schemas.openxmlformats.org/presentationml/2006/main">
+  <p:cSld>
+    <p:spTree>
+      <p:nvGrpSpPr>
+        <p:cNvPr id="1" name=""/>
+        <p:cNvGrpSpPr/>
+        <p:nvPr/>
+      </p:nvGrpSpPr>
+      <p:grpSpPr>
+        <a:xfrm>
+          <a:off x="0" y="0"/>
+          <a:ext cx="0" cy="0"/>
+          <a:chOff x="0" y="0"/>
+          <a:chExt cx="0" cy="0"/>
+        </a:xfrm>
+      </p:grpSpPr>
+      <p:sp>
+        <p:nvSpPr>
+          <p:cNvPr id="2" name="标题 1">
+            <a:extLst>
+              <a:ext uri="{FF2B5EF4-FFF2-40B4-BE49-F238E27FC236}">
+                <a16:creationId xmlns:a16="http://schemas.microsoft.com/office/drawing/2014/main" id="{60D513CA-4F2A-DF22-E7E7-9FF69992FEDC}"/>
+              </a:ext>
+            </a:extLst>
+          </p:cNvPr>
+          <p:cNvSpPr>
+            <a:spLocks noGrp="1"/>
+          </p:cNvSpPr>
+          <p:nvPr>
+            <p:ph type="title"/>
+          </p:nvPr>
+        </p:nvSpPr>
+        <p:spPr/>
+        <p:txBody>
+          <a:bodyPr/>
+          <a:lstStyle/>
+          <a:p>
+            <a:endParaRPr lang="zh-CN" altLang="en-US"/>
+          </a:p>
+        </p:txBody>
+      </p:sp>
+      <p:pic>
+        <p:nvPicPr>
+          <p:cNvPr id="5" name="内容占位符 4">
+            <a:extLst>
+              <a:ext uri="{FF2B5EF4-FFF2-40B4-BE49-F238E27FC236}">
+                <a16:creationId xmlns:a16="http://schemas.microsoft.com/office/drawing/2014/main" id="{C48EAED8-E7C4-8E4F-107C-A284F7EB73A7}"/>
+              </a:ext>
+            </a:extLst>
+          </p:cNvPr>
+          <p:cNvPicPr>
+            <a:picLocks noGrp="1" noChangeAspect="1"/>
+          </p:cNvPicPr>
+          <p:nvPr>
+            <p:ph idx="1"/>
+          </p:nvPr>
+        </p:nvPicPr>
+        <p:blipFill rotWithShape="1">
+          <a:blip r:embed="rId2"/>
+          <a:srcRect r="8228"/>
+          <a:stretch/>
+        </p:blipFill>
+        <p:spPr>
+          <a:xfrm>
+            <a:off x="8965" y="502024"/>
+            <a:ext cx="11954436" cy="6203576"/>
+          </a:xfrm>
+        </p:spPr>
+      </p:pic>
+    </p:spTree>
+    <p:extLst>
+      <p:ext uri="{BB962C8B-B14F-4D97-AF65-F5344CB8AC3E}">
+        <p14:creationId xmlns:p14="http://schemas.microsoft.com/office/powerpoint/2010/main" val="87136166"/>
+      </p:ext>
+    </p:extLst>
+  </p:cSld>
+  <p:clrMapOvr>
+    <a:masterClrMapping/>
+  </p:clrMapOvr>
+</p:sld>
+</file>
+
+<file path=ppt/slides/slide61.xml><?xml version="1.0" encoding="utf-8"?>
+<p:sld xmlns:a="http://schemas.openxmlformats.org/drawingml/2006/main" xmlns:r="http://schemas.openxmlformats.org/officeDocument/2006/relationships" xmlns:p="http://schemas.openxmlformats.org/presentationml/2006/main">
+  <p:cSld>
+    <p:spTree>
+      <p:nvGrpSpPr>
+        <p:cNvPr id="1" name=""/>
+        <p:cNvGrpSpPr/>
+        <p:nvPr/>
+      </p:nvGrpSpPr>
+      <p:grpSpPr>
+        <a:xfrm>
+          <a:off x="0" y="0"/>
+          <a:ext cx="0" cy="0"/>
+          <a:chOff x="0" y="0"/>
+          <a:chExt cx="0" cy="0"/>
+        </a:xfrm>
+      </p:grpSpPr>
+      <p:sp>
+        <p:nvSpPr>
+          <p:cNvPr id="2" name="标题 1">
+            <a:extLst>
+              <a:ext uri="{FF2B5EF4-FFF2-40B4-BE49-F238E27FC236}">
+                <a16:creationId xmlns:a16="http://schemas.microsoft.com/office/drawing/2014/main" id="{81699A57-F1B7-2937-99EA-7540214044D4}"/>
+              </a:ext>
+            </a:extLst>
+          </p:cNvPr>
+          <p:cNvSpPr>
+            <a:spLocks noGrp="1"/>
+          </p:cNvSpPr>
+          <p:nvPr>
+            <p:ph type="title"/>
+          </p:nvPr>
+        </p:nvSpPr>
+        <p:spPr/>
+        <p:txBody>
+          <a:bodyPr/>
+          <a:lstStyle/>
+          <a:p>
+            <a:endParaRPr lang="zh-CN" altLang="en-US"/>
+          </a:p>
+        </p:txBody>
+      </p:sp>
+      <p:pic>
+        <p:nvPicPr>
+          <p:cNvPr id="5" name="内容占位符 4">
+            <a:extLst>
+              <a:ext uri="{FF2B5EF4-FFF2-40B4-BE49-F238E27FC236}">
+                <a16:creationId xmlns:a16="http://schemas.microsoft.com/office/drawing/2014/main" id="{ED788C9F-1791-7AC7-D0CC-88DFFBFC6B47}"/>
+              </a:ext>
+            </a:extLst>
+          </p:cNvPr>
+          <p:cNvPicPr>
+            <a:picLocks noGrp="1" noChangeAspect="1"/>
+          </p:cNvPicPr>
+          <p:nvPr>
+            <p:ph idx="1"/>
+          </p:nvPr>
+        </p:nvPicPr>
+        <p:blipFill rotWithShape="1">
+          <a:blip r:embed="rId2"/>
+          <a:srcRect r="11637"/>
+          <a:stretch/>
+        </p:blipFill>
+        <p:spPr>
+          <a:xfrm>
+            <a:off x="-1" y="502024"/>
+            <a:ext cx="12192001" cy="5898776"/>
+          </a:xfrm>
+        </p:spPr>
+      </p:pic>
+    </p:spTree>
+    <p:extLst>
+      <p:ext uri="{BB962C8B-B14F-4D97-AF65-F5344CB8AC3E}">
+        <p14:creationId xmlns:p14="http://schemas.microsoft.com/office/powerpoint/2010/main" val="1895434708"/>
+      </p:ext>
+    </p:extLst>
+  </p:cSld>
+  <p:clrMapOvr>
+    <a:masterClrMapping/>
+  </p:clrMapOvr>
+</p:sld>
+</file>
+
+<file path=ppt/slides/slide62.xml><?xml version="1.0" encoding="utf-8"?>
+<p:sld xmlns:a="http://schemas.openxmlformats.org/drawingml/2006/main" xmlns:r="http://schemas.openxmlformats.org/officeDocument/2006/relationships" xmlns:p="http://schemas.openxmlformats.org/presentationml/2006/main">
+  <p:cSld>
+    <p:spTree>
+      <p:nvGrpSpPr>
+        <p:cNvPr id="1" name=""/>
+        <p:cNvGrpSpPr/>
+        <p:nvPr/>
+      </p:nvGrpSpPr>
+      <p:grpSpPr>
+        <a:xfrm>
+          <a:off x="0" y="0"/>
+          <a:ext cx="0" cy="0"/>
+          <a:chOff x="0" y="0"/>
+          <a:chExt cx="0" cy="0"/>
+        </a:xfrm>
+      </p:grpSpPr>
+      <p:sp>
+        <p:nvSpPr>
+          <p:cNvPr id="2" name="标题 1">
+            <a:extLst>
+              <a:ext uri="{FF2B5EF4-FFF2-40B4-BE49-F238E27FC236}">
+                <a16:creationId xmlns:a16="http://schemas.microsoft.com/office/drawing/2014/main" id="{D9FD367E-4F4B-31B9-22B7-36347E28F360}"/>
+              </a:ext>
+            </a:extLst>
+          </p:cNvPr>
+          <p:cNvSpPr>
+            <a:spLocks noGrp="1"/>
+          </p:cNvSpPr>
+          <p:nvPr>
+            <p:ph type="title"/>
+          </p:nvPr>
+        </p:nvSpPr>
+        <p:spPr/>
+        <p:txBody>
+          <a:bodyPr/>
+          <a:lstStyle/>
+          <a:p>
+            <a:endParaRPr lang="zh-CN" altLang="en-US"/>
+          </a:p>
+        </p:txBody>
+      </p:sp>
+      <p:pic>
+        <p:nvPicPr>
+          <p:cNvPr id="5" name="内容占位符 4">
+            <a:extLst>
+              <a:ext uri="{FF2B5EF4-FFF2-40B4-BE49-F238E27FC236}">
+                <a16:creationId xmlns:a16="http://schemas.microsoft.com/office/drawing/2014/main" id="{DE953582-E35C-ED30-D8EE-C15F48B11ECE}"/>
+              </a:ext>
+            </a:extLst>
+          </p:cNvPr>
+          <p:cNvPicPr>
+            <a:picLocks noGrp="1" noChangeAspect="1"/>
+          </p:cNvPicPr>
+          <p:nvPr>
+            <p:ph idx="1"/>
+          </p:nvPr>
+        </p:nvPicPr>
+        <p:blipFill rotWithShape="1">
+          <a:blip r:embed="rId2"/>
+          <a:srcRect r="16381"/>
+          <a:stretch/>
+        </p:blipFill>
+        <p:spPr>
+          <a:xfrm>
+            <a:off x="-1" y="533400"/>
+            <a:ext cx="12192001" cy="5943600"/>
+          </a:xfrm>
+        </p:spPr>
+      </p:pic>
+    </p:spTree>
+    <p:extLst>
+      <p:ext uri="{BB962C8B-B14F-4D97-AF65-F5344CB8AC3E}">
+        <p14:creationId xmlns:p14="http://schemas.microsoft.com/office/powerpoint/2010/main" val="3042102021"/>
+      </p:ext>
+    </p:extLst>
+  </p:cSld>
+  <p:clrMapOvr>
+    <a:masterClrMapping/>
+  </p:clrMapOvr>
+</p:sld>
+</file>
+
+<file path=ppt/slides/slide63.xml><?xml version="1.0" encoding="utf-8"?>
+<p:sld xmlns:a="http://schemas.openxmlformats.org/drawingml/2006/main" xmlns:r="http://schemas.openxmlformats.org/officeDocument/2006/relationships" xmlns:p="http://schemas.openxmlformats.org/presentationml/2006/main">
+  <p:cSld>
+    <p:spTree>
+      <p:nvGrpSpPr>
+        <p:cNvPr id="1" name=""/>
+        <p:cNvGrpSpPr/>
+        <p:nvPr/>
+      </p:nvGrpSpPr>
+      <p:grpSpPr>
+        <a:xfrm>
+          <a:off x="0" y="0"/>
+          <a:ext cx="0" cy="0"/>
+          <a:chOff x="0" y="0"/>
+          <a:chExt cx="0" cy="0"/>
+        </a:xfrm>
+      </p:grpSpPr>
+      <p:sp>
+        <p:nvSpPr>
+          <p:cNvPr id="2" name="标题 1">
+            <a:extLst>
+              <a:ext uri="{FF2B5EF4-FFF2-40B4-BE49-F238E27FC236}">
+                <a16:creationId xmlns:a16="http://schemas.microsoft.com/office/drawing/2014/main" id="{7685B575-43E0-8B58-3957-B77DA0788D0A}"/>
+              </a:ext>
+            </a:extLst>
+          </p:cNvPr>
+          <p:cNvSpPr>
+            <a:spLocks noGrp="1"/>
+          </p:cNvSpPr>
+          <p:nvPr>
+            <p:ph type="title"/>
+          </p:nvPr>
+        </p:nvSpPr>
+        <p:spPr/>
+        <p:txBody>
+          <a:bodyPr/>
+          <a:lstStyle/>
+          <a:p>
+            <a:endParaRPr lang="zh-CN" altLang="en-US"/>
+          </a:p>
+        </p:txBody>
+      </p:sp>
+      <p:pic>
+        <p:nvPicPr>
+          <p:cNvPr id="5" name="内容占位符 4">
+            <a:extLst>
+              <a:ext uri="{FF2B5EF4-FFF2-40B4-BE49-F238E27FC236}">
+                <a16:creationId xmlns:a16="http://schemas.microsoft.com/office/drawing/2014/main" id="{5EE7A34A-A250-AB6D-36DE-09C2C8B7C9DC}"/>
+              </a:ext>
+            </a:extLst>
+          </p:cNvPr>
+          <p:cNvPicPr>
+            <a:picLocks noGrp="1" noChangeAspect="1"/>
+          </p:cNvPicPr>
+          <p:nvPr>
+            <p:ph idx="1"/>
+          </p:nvPr>
+        </p:nvPicPr>
+        <p:blipFill rotWithShape="1">
+          <a:blip r:embed="rId2"/>
+          <a:srcRect r="12864"/>
+          <a:stretch/>
+        </p:blipFill>
+        <p:spPr>
+          <a:xfrm>
+            <a:off x="26895" y="457200"/>
+            <a:ext cx="12012706" cy="6172200"/>
+          </a:xfrm>
+        </p:spPr>
+      </p:pic>
+    </p:spTree>
+    <p:extLst>
+      <p:ext uri="{BB962C8B-B14F-4D97-AF65-F5344CB8AC3E}">
+        <p14:creationId xmlns:p14="http://schemas.microsoft.com/office/powerpoint/2010/main" val="1735689555"/>
+      </p:ext>
+    </p:extLst>
+  </p:cSld>
+  <p:clrMapOvr>
+    <a:masterClrMapping/>
+  </p:clrMapOvr>
+</p:sld>
+</file>
+
+<file path=ppt/slides/slide64.xml><?xml version="1.0" encoding="utf-8"?>
+<p:sld xmlns:a="http://schemas.openxmlformats.org/drawingml/2006/main" xmlns:r="http://schemas.openxmlformats.org/officeDocument/2006/relationships" xmlns:p="http://schemas.openxmlformats.org/presentationml/2006/main">
+  <p:cSld>
+    <p:spTree>
+      <p:nvGrpSpPr>
+        <p:cNvPr id="1" name=""/>
+        <p:cNvGrpSpPr/>
+        <p:nvPr/>
+      </p:nvGrpSpPr>
+      <p:grpSpPr>
+        <a:xfrm>
+          <a:off x="0" y="0"/>
+          <a:ext cx="0" cy="0"/>
+          <a:chOff x="0" y="0"/>
+          <a:chExt cx="0" cy="0"/>
+        </a:xfrm>
+      </p:grpSpPr>
+      <p:sp>
+        <p:nvSpPr>
+          <p:cNvPr id="2" name="标题 1">
+            <a:extLst>
+              <a:ext uri="{FF2B5EF4-FFF2-40B4-BE49-F238E27FC236}">
+                <a16:creationId xmlns:a16="http://schemas.microsoft.com/office/drawing/2014/main" id="{0E75D288-F82F-9598-3947-9D4C5AEDF0B6}"/>
+              </a:ext>
+            </a:extLst>
+          </p:cNvPr>
+          <p:cNvSpPr>
+            <a:spLocks noGrp="1"/>
+          </p:cNvSpPr>
+          <p:nvPr>
+            <p:ph type="title"/>
+          </p:nvPr>
+        </p:nvSpPr>
+        <p:spPr/>
+        <p:txBody>
+          <a:bodyPr/>
+          <a:lstStyle/>
+          <a:p>
+            <a:endParaRPr lang="zh-CN" altLang="en-US"/>
+          </a:p>
+        </p:txBody>
+      </p:sp>
+      <p:pic>
+        <p:nvPicPr>
+          <p:cNvPr id="5" name="内容占位符 4">
+            <a:extLst>
+              <a:ext uri="{FF2B5EF4-FFF2-40B4-BE49-F238E27FC236}">
+                <a16:creationId xmlns:a16="http://schemas.microsoft.com/office/drawing/2014/main" id="{C28B8CBD-8D4B-550C-351B-37960A0401C7}"/>
+              </a:ext>
+            </a:extLst>
+          </p:cNvPr>
+          <p:cNvPicPr>
+            <a:picLocks noGrp="1" noChangeAspect="1"/>
+          </p:cNvPicPr>
+          <p:nvPr>
+            <p:ph idx="1"/>
+          </p:nvPr>
+        </p:nvPicPr>
+        <p:blipFill>
+          <a:blip r:embed="rId2"/>
+          <a:stretch>
+            <a:fillRect/>
+          </a:stretch>
+        </p:blipFill>
+        <p:spPr>
+          <a:xfrm>
+            <a:off x="8964" y="502024"/>
+            <a:ext cx="11874465" cy="6203576"/>
+          </a:xfrm>
+        </p:spPr>
+      </p:pic>
+    </p:spTree>
+    <p:extLst>
+      <p:ext uri="{BB962C8B-B14F-4D97-AF65-F5344CB8AC3E}">
+        <p14:creationId xmlns:p14="http://schemas.microsoft.com/office/powerpoint/2010/main" val="3961241898"/>
+      </p:ext>
+    </p:extLst>
+  </p:cSld>
+  <p:clrMapOvr>
+    <a:masterClrMapping/>
+  </p:clrMapOvr>
+</p:sld>
+</file>
+
+<file path=ppt/slides/slide65.xml><?xml version="1.0" encoding="utf-8"?>
+<p:sld xmlns:a="http://schemas.openxmlformats.org/drawingml/2006/main" xmlns:r="http://schemas.openxmlformats.org/officeDocument/2006/relationships" xmlns:p="http://schemas.openxmlformats.org/presentationml/2006/main">
+  <p:cSld>
+    <p:spTree>
+      <p:nvGrpSpPr>
+        <p:cNvPr id="1" name=""/>
+        <p:cNvGrpSpPr/>
+        <p:nvPr/>
+      </p:nvGrpSpPr>
+      <p:grpSpPr>
+        <a:xfrm>
+          <a:off x="0" y="0"/>
+          <a:ext cx="0" cy="0"/>
+          <a:chOff x="0" y="0"/>
+          <a:chExt cx="0" cy="0"/>
+        </a:xfrm>
+      </p:grpSpPr>
+      <p:sp>
+        <p:nvSpPr>
+          <p:cNvPr id="2" name="标题 1">
+            <a:extLst>
+              <a:ext uri="{FF2B5EF4-FFF2-40B4-BE49-F238E27FC236}">
+                <a16:creationId xmlns:a16="http://schemas.microsoft.com/office/drawing/2014/main" id="{C5B0A6AF-1FAF-E96B-0B03-2411FF477BE1}"/>
+              </a:ext>
+            </a:extLst>
+          </p:cNvPr>
+          <p:cNvSpPr>
+            <a:spLocks noGrp="1"/>
+          </p:cNvSpPr>
+          <p:nvPr>
+            <p:ph type="title"/>
+          </p:nvPr>
+        </p:nvSpPr>
+        <p:spPr/>
+        <p:txBody>
+          <a:bodyPr/>
+          <a:lstStyle/>
+          <a:p>
+            <a:endParaRPr lang="zh-CN" altLang="en-US"/>
+          </a:p>
+        </p:txBody>
+      </p:sp>
+      <p:pic>
+        <p:nvPicPr>
+          <p:cNvPr id="5" name="内容占位符 4">
+            <a:extLst>
+              <a:ext uri="{FF2B5EF4-FFF2-40B4-BE49-F238E27FC236}">
+                <a16:creationId xmlns:a16="http://schemas.microsoft.com/office/drawing/2014/main" id="{38407E7E-A6F0-1446-3695-D9A0CFDAD54C}"/>
+              </a:ext>
+            </a:extLst>
+          </p:cNvPr>
+          <p:cNvPicPr>
+            <a:picLocks noGrp="1" noChangeAspect="1"/>
+          </p:cNvPicPr>
+          <p:nvPr>
+            <p:ph idx="1"/>
+          </p:nvPr>
+        </p:nvPicPr>
+        <p:blipFill rotWithShape="1">
+          <a:blip r:embed="rId2"/>
+          <a:srcRect r="10545"/>
+          <a:stretch/>
+        </p:blipFill>
+        <p:spPr>
+          <a:xfrm>
+            <a:off x="26894" y="457200"/>
+            <a:ext cx="12165106" cy="6324600"/>
+          </a:xfrm>
+        </p:spPr>
+      </p:pic>
+    </p:spTree>
+    <p:extLst>
+      <p:ext uri="{BB962C8B-B14F-4D97-AF65-F5344CB8AC3E}">
+        <p14:creationId xmlns:p14="http://schemas.microsoft.com/office/powerpoint/2010/main" val="3513205118"/>
+      </p:ext>
+    </p:extLst>
+  </p:cSld>
+  <p:clrMapOvr>
+    <a:masterClrMapping/>
+  </p:clrMapOvr>
+</p:sld>
+</file>
+
+<file path=ppt/slides/slide66.xml><?xml version="1.0" encoding="utf-8"?>
+<p:sld xmlns:a="http://schemas.openxmlformats.org/drawingml/2006/main" xmlns:r="http://schemas.openxmlformats.org/officeDocument/2006/relationships" xmlns:p="http://schemas.openxmlformats.org/presentationml/2006/main">
+  <p:cSld>
+    <p:spTree>
+      <p:nvGrpSpPr>
+        <p:cNvPr id="1" name=""/>
+        <p:cNvGrpSpPr/>
+        <p:nvPr/>
+      </p:nvGrpSpPr>
+      <p:grpSpPr>
+        <a:xfrm>
+          <a:off x="0" y="0"/>
+          <a:ext cx="0" cy="0"/>
+          <a:chOff x="0" y="0"/>
+          <a:chExt cx="0" cy="0"/>
+        </a:xfrm>
+      </p:grpSpPr>
+      <p:sp>
+        <p:nvSpPr>
+          <p:cNvPr id="2" name="标题 1">
+            <a:extLst>
+              <a:ext uri="{FF2B5EF4-FFF2-40B4-BE49-F238E27FC236}">
+                <a16:creationId xmlns:a16="http://schemas.microsoft.com/office/drawing/2014/main" id="{7D543B34-6D65-AEBC-8598-AA2C5A1F5D7C}"/>
+              </a:ext>
+            </a:extLst>
+          </p:cNvPr>
+          <p:cNvSpPr>
+            <a:spLocks noGrp="1"/>
+          </p:cNvSpPr>
+          <p:nvPr>
+            <p:ph type="title"/>
+          </p:nvPr>
+        </p:nvSpPr>
+        <p:spPr/>
+        <p:txBody>
+          <a:bodyPr/>
+          <a:lstStyle/>
+          <a:p>
+            <a:endParaRPr lang="zh-CN" altLang="en-US"/>
+          </a:p>
+        </p:txBody>
+      </p:sp>
+      <p:pic>
+        <p:nvPicPr>
+          <p:cNvPr id="5" name="内容占位符 4">
+            <a:extLst>
+              <a:ext uri="{FF2B5EF4-FFF2-40B4-BE49-F238E27FC236}">
+                <a16:creationId xmlns:a16="http://schemas.microsoft.com/office/drawing/2014/main" id="{928E38A5-9967-A5AC-4E82-6930BAEA4613}"/>
+              </a:ext>
+            </a:extLst>
+          </p:cNvPr>
+          <p:cNvPicPr>
+            <a:picLocks noGrp="1" noChangeAspect="1"/>
+          </p:cNvPicPr>
+          <p:nvPr>
+            <p:ph idx="1"/>
+          </p:nvPr>
+        </p:nvPicPr>
+        <p:blipFill rotWithShape="1">
+          <a:blip r:embed="rId2"/>
+          <a:srcRect r="8834"/>
+          <a:stretch/>
+        </p:blipFill>
+        <p:spPr>
+          <a:xfrm>
+            <a:off x="1" y="502024"/>
+            <a:ext cx="12039600" cy="6203576"/>
+          </a:xfrm>
+        </p:spPr>
+      </p:pic>
+    </p:spTree>
+    <p:extLst>
+      <p:ext uri="{BB962C8B-B14F-4D97-AF65-F5344CB8AC3E}">
+        <p14:creationId xmlns:p14="http://schemas.microsoft.com/office/powerpoint/2010/main" val="287390102"/>
       </p:ext>
     </p:extLst>
   </p:cSld>
@@ -15839,15 +16932,7 @@
             </a:r>
             <a:r>
               <a:rPr lang="en-US" altLang="zh-CN" b="0" dirty="0"/>
-              <a:t>  </a:t>
-            </a:r>
-            <a:r>
-              <a:rPr lang="en-US" altLang="zh-CN" b="0" dirty="0" err="1"/>
-              <a:t>elemArray</a:t>
-            </a:r>
-            <a:r>
-              <a:rPr lang="en-US" altLang="zh-CN" b="0" dirty="0"/>
-              <a:t>[STACK_SIZE];</a:t>
+              <a:t>  a[STACK_SIZE];</a:t>
             </a:r>
           </a:p>
           <a:p>
